--- a/examples/overview/src/ppt_md_merger_overview.pptx
+++ b/examples/overview/src/ppt_md_merger_overview.pptx
@@ -620,9 +620,7 @@
               <a:t>NOTE_CONTENT_FORMAT: 1.0</a:t>
             </a:r>
           </a:p>
-          <a:p>
-            <a:endParaRPr/>
-          </a:p>
+          <a:p/>
           <a:p>
             <a:r>
               <a:t>===BLOCK===</a:t>
@@ -633,9 +631,7 @@
               <a:t>{{BLOCK:IMAGE}}</a:t>
             </a:r>
           </a:p>
-          <a:p>
-            <a:endParaRPr/>
-          </a:p>
+          <a:p/>
           <a:p>
             <a:r>
               <a:t>export-image-mode: slide_with_rectpct</a:t>
@@ -648,13 +644,10 @@
           </a:p>
           <a:p>
             <a:r>
-              <a:rPr lang="en-US"/>
               <a:t>export-image: ../extracted/figures/&lt;__BASEFILENAME__&gt;_slide&lt;__SLIDENUM__&gt;_fig.png</a:t>
             </a:r>
           </a:p>
-          <a:p>
-            <a:endParaRPr/>
-          </a:p>
+          <a:p/>
           <a:p>
             <a:r>
               <a:t>===BLOCK===</a:t>
@@ -665,246 +658,72 @@
               <a:t>{{BLOCK:MD:LONG}}</a:t>
             </a:r>
           </a:p>
-          <a:p>
-            <a:endParaRPr/>
-          </a:p>
-          <a:p>
-            <a:r>
-              <a:rPr lang="en-US"/>
-              <a:t>export-note: </a:t>
-            </a:r>
-            <a:r>
-              <a:rPr lang="en-US" altLang="ja-JP"/>
-              <a:t>../</a:t>
-            </a:r>
-            <a:r>
-              <a:rPr lang="en-US"/>
-              <a:t>extracted/&lt;__BASEFILENAME__&gt;_slide&lt;__SLIDENUM__&gt;_md.md</a:t>
-            </a:r>
-          </a:p>
-          <a:p>
-            <a:r>
-              <a:rPr lang="en-US"/>
+          <a:p/>
+          <a:p>
+            <a:r>
+              <a:t>export-note: ../extracted/&lt;__BASEFILENAME__&gt;_slide&lt;__SLIDENUM__&gt;_md.md</a:t>
+            </a:r>
+          </a:p>
+          <a:p>
+            <a:r>
               <a:t>{{#id:section:&lt;__BASEFILENAME__&gt;:slide&lt;__SLIDENUM__&gt;}}</a:t>
             </a:r>
           </a:p>
           <a:p>
             <a:r>
-              <a:rPr lang="en-US"/>
               <a:t>## &lt;__TITLE__&gt;</a:t>
             </a:r>
           </a:p>
-          <a:p>
-            <a:endParaRPr lang="en-US"/>
-          </a:p>
-          <a:p>
-            <a:r>
-              <a:rPr lang="en-US"/>
-              <a:t>PPT &amp; MD merger </a:t>
-            </a:r>
-            <a:r>
-              <a:rPr lang="ja-JP" altLang="en-US"/>
-              <a:t>は、「</a:t>
-            </a:r>
-            <a:r>
-              <a:t>pptxファイルを文書部品として扱い、多様な形式の文書を生成できるジェネレーター」 です。　（ツールそのものは Python スクリプトであり、Windows + PowerPoint 環境で</a:t>
-            </a:r>
-            <a:r>
-              <a:rPr lang="ja-JP" altLang="en-US"/>
-              <a:t>動作します</a:t>
-            </a:r>
-            <a:r>
-              <a:t>）</a:t>
-            </a:r>
-          </a:p>
-          <a:p>
-            <a:endParaRPr/>
-          </a:p>
-          <a:p>
-            <a:r>
-              <a:t>```{=latex}</a:t>
-            </a:r>
-          </a:p>
-          <a:p>
-            <a:r>
-              <a:t>\begin{center}</a:t>
-            </a:r>
-          </a:p>
-          <a:p>
-            <a:r>
-              <a:t>```</a:t>
-            </a:r>
-          </a:p>
-          <a:p>
-            <a:endParaRPr/>
-          </a:p>
-          <a:p>
-            <a:r>
-              <a:rPr lang="en-US"/>
+          <a:p/>
+          <a:p>
+            <a:r>
+              <a:t>PPT &amp; MD merger は、「pptxファイルを文書部品として扱い、多様な形式の文書を生成できるジェネレーター」 です。　（ツールそのものは Python スクリプトであり、Windows + PowerPoint 環境で動作します）</a:t>
+            </a:r>
+          </a:p>
+          <a:p/>
+          <a:p>
+            <a:r>
+              <a:t>::: {.center}</a:t>
+            </a:r>
+          </a:p>
+          <a:p/>
+          <a:p>
+            <a:r>
               <a:t>![](figures/&lt;__BASEFILENAME__&gt;_slide&lt;__SLIDENUM__&gt;_fig.png){ width=95% }</a:t>
             </a:r>
           </a:p>
-          <a:p>
-            <a:endParaRPr/>
-          </a:p>
-          <a:p>
-            <a:r>
-              <a:t>```{=latex}</a:t>
-            </a:r>
-          </a:p>
-          <a:p>
-            <a:r>
-              <a:t>\end{center}</a:t>
-            </a:r>
-          </a:p>
-          <a:p>
-            <a:r>
-              <a:t>```</a:t>
-            </a:r>
-          </a:p>
-          <a:p>
-            <a:endParaRPr lang="en-US"/>
-          </a:p>
-          <a:p>
-            <a:r>
-              <a:rPr lang="ja-JP" altLang="en-US"/>
-              <a:t>何はともあれ使ってみたい、という場合は　</a:t>
-            </a:r>
-            <a:r>
-              <a:rPr lang="en-US" altLang="ja-JP"/>
-              <a:t>[5</a:t>
-            </a:r>
-            <a:r>
-              <a:rPr lang="en-US" altLang="ja-JP" sz="1200" kern="0">
-                <a:latin typeface="BIZ UDPゴシック" panose="020B0400000000000000" pitchFamily="50" charset="-128"/>
-                <a:ea typeface="BIZ UDPゴシック" panose="020B0400000000000000" pitchFamily="50" charset="-128"/>
-              </a:rPr>
-              <a:t>) Requirements &amp; Quick Start</a:t>
-            </a:r>
-            <a:r>
-              <a:rPr lang="en-US" altLang="ja-JP"/>
-              <a:t>](#5-requirements--quick-start) </a:t>
-            </a:r>
-            <a:r>
-              <a:rPr lang="ja-JP" altLang="en-US"/>
-              <a:t>をご覧ください。システム要件、インストール方法、</a:t>
-            </a:r>
-            <a:r>
-              <a:rPr lang="en-US" altLang="ja-JP"/>
-              <a:t>Quick Start </a:t>
-            </a:r>
-            <a:r>
-              <a:rPr lang="ja-JP" altLang="en-US"/>
-              <a:t>ガイド、</a:t>
-            </a:r>
-            <a:r>
-              <a:rPr lang="en-US" altLang="ja-JP"/>
-              <a:t>11</a:t>
-            </a:r>
-            <a:r>
-              <a:rPr lang="ja-JP" altLang="en-US"/>
-              <a:t>種類のサンプルデータの案内があります。</a:t>
-            </a:r>
-            <a:endParaRPr lang="en-US" altLang="ja-JP"/>
-          </a:p>
-          <a:p>
-            <a:endParaRPr lang="en-US"/>
-          </a:p>
-          <a:p>
-            <a:r>
-              <a:rPr lang="ja-JP" altLang="en-US"/>
-              <a:t>何やら変わったコンセプトっぽいから、そこからじっくり知りたいという場合はこのまま次の </a:t>
-            </a:r>
-            <a:r>
-              <a:rPr lang="en-US" altLang="ja-JP"/>
-              <a:t>[2) </a:t>
-            </a:r>
-            <a:r>
-              <a:rPr lang="ja-JP" altLang="en-US"/>
-              <a:t>大きな </a:t>
-            </a:r>
-            <a:r>
-              <a:rPr lang="en-US" altLang="ja-JP"/>
-              <a:t>PowerPoint</a:t>
-            </a:r>
-            <a:r>
-              <a:rPr lang="ja-JP" altLang="en-US"/>
-              <a:t>ファイ ルを作る時の悩みとは？</a:t>
-            </a:r>
-            <a:r>
-              <a:rPr lang="en-US" altLang="ja-JP"/>
-              <a:t>](#2-%E5%A4%A7%E3%81%8D%E3%81%AApowerpoint%E3%83%95%E3%82%A1%E3%82%A4%E3%83%AB%E3%82%92%E4%BD%9C%E3%82%8B%E6%99%82%E3%81%AE%E6%82%A9%E3%81%BF%E3%81%A8%E3%81%AF) </a:t>
-            </a:r>
-            <a:r>
-              <a:rPr lang="ja-JP" altLang="en-US"/>
-              <a:t>へ進んでください。</a:t>
-            </a:r>
-            <a:endParaRPr lang="en-US" altLang="ja-JP"/>
-          </a:p>
-          <a:p>
-            <a:endParaRPr lang="en-US" altLang="ja-JP"/>
-          </a:p>
-          <a:p>
-            <a:r>
-              <a:rPr lang="ja-JP" altLang="en-US"/>
-              <a:t>何ができるツールなのか詳細に知りたい場合は</a:t>
-            </a:r>
-            <a:r>
-              <a:rPr lang="en-US" altLang="ja-JP"/>
-              <a:t>[5.4) Examples](#54-examples)</a:t>
-            </a:r>
-            <a:r>
-              <a:rPr lang="ja-JP" altLang="en-US"/>
-              <a:t>から機能別詳細解説に飛べます。</a:t>
-            </a:r>
-          </a:p>
-          <a:p>
-            <a:endParaRPr lang="ja-JP" altLang="en-US"/>
-          </a:p>
-          <a:p>
-            <a:r>
-              <a:rPr lang="ja-JP" altLang="en-US"/>
-              <a:t>ただし、現時点での機能解説は </a:t>
-            </a:r>
-            <a:r>
-              <a:rPr lang="en-US" altLang="ja-JP"/>
-              <a:t>PPTX </a:t>
-            </a:r>
-            <a:r>
-              <a:rPr lang="ja-JP" altLang="en-US"/>
-              <a:t>をマージ生成する例のみで、</a:t>
-            </a:r>
-            <a:r>
-              <a:rPr lang="en-US" altLang="ja-JP"/>
-              <a:t>MD,PDF,HTML </a:t>
-            </a:r>
-            <a:r>
-              <a:rPr lang="ja-JP" altLang="en-US"/>
-              <a:t>等の他形式文書を生成する例の解説は作っておりません。機能としては動いていますが設定が複雑なため、ドキュメントを書くのに少し時間がかかる見込みです。（</a:t>
-            </a:r>
-            <a:r>
-              <a:rPr lang="en-US" altLang="ja-JP"/>
-              <a:t>[</a:t>
-            </a:r>
-            <a:r>
-              <a:rPr lang="ja-JP" altLang="en-US"/>
-              <a:t>仕様書</a:t>
-            </a:r>
-            <a:r>
-              <a:rPr lang="en-US" altLang="ja-JP"/>
-              <a:t>](/docs/md_merge_spec.md)</a:t>
-            </a:r>
-            <a:r>
-              <a:rPr lang="ja-JP" altLang="en-US"/>
-              <a:t>はありますが、これを読んで使い方が分かるかというと難しいです）</a:t>
-            </a:r>
-          </a:p>
-          <a:p>
-            <a:endParaRPr lang="en-US" altLang="ja-JP"/>
-          </a:p>
-          <a:p>
-            <a:endParaRPr/>
-          </a:p>
+          <a:p/>
+          <a:p>
+            <a:r>
+              <a:t>:::</a:t>
+            </a:r>
+          </a:p>
+          <a:p/>
+          <a:p>
+            <a:r>
+              <a:t>何はともあれ使ってみたい、という場合は　[5) Requirements &amp; Quick Start](#5-requirements--quick-start) をご覧ください。システム要件、インストール方法、Quick Start ガイド、11種類のサンプルデータの案内があります。</a:t>
+            </a:r>
+          </a:p>
+          <a:p/>
+          <a:p>
+            <a:r>
+              <a:t>何やら変わったコンセプトっぽいから、そこからじっくり知りたいという場合はこのまま次の [2) 大きな PowerPointファイ ルを作る時の悩みとは？](#2-%E5%A4%A7%E3%81%8D%E3%81%AApowerpoint%E3%83%95%E3%82%A1%E3%82%A4%E3%83%AB%E3%82%92%E4%BD%9C%E3%82%8B%E6%99%82%E3%81%AE%E6%82%A9%E3%81%BF%E3%81%A8%E3%81%AF) へ進んでください。</a:t>
+            </a:r>
+          </a:p>
+          <a:p/>
+          <a:p>
+            <a:r>
+              <a:t>何ができるツールなのか詳細に知りたい場合は[5.4) Examples](#54-examples)から機能別詳細解説に飛べます。</a:t>
+            </a:r>
+          </a:p>
+          <a:p/>
+          <a:p>
+            <a:r>
+              <a:t>ただし、現時点での機能解説は PPTX をマージ生成する例のみで、MD,PDF,HTML 等の他形式文書を生成する例の解説は作っておりません。機能としては動いていますが設定が複雑なため、ドキュメントを書くのに少し時間がかかる見込みです。（[仕様書](/docs/md_merge_spec.md)はありますが、これを読んで使い方が分かるかというと難しいです）</a:t>
+            </a:r>
+          </a:p>
+          <a:p/>
+          <a:p/>
         </p:txBody>
       </p:sp>
       <p:sp>
@@ -1015,9 +834,7 @@
               <a:t>NOTE_CONTENT_FORMAT: 1.0</a:t>
             </a:r>
           </a:p>
-          <a:p>
-            <a:endParaRPr/>
-          </a:p>
+          <a:p/>
           <a:p>
             <a:r>
               <a:t>===BLOCK===</a:t>
@@ -1028,9 +845,7 @@
               <a:t>{{BLOCK:IMAGE}}</a:t>
             </a:r>
           </a:p>
-          <a:p>
-            <a:endParaRPr/>
-          </a:p>
+          <a:p/>
           <a:p>
             <a:r>
               <a:t>export-image-mode: slide_with_rectpct</a:t>
@@ -1043,13 +858,10 @@
           </a:p>
           <a:p>
             <a:r>
-              <a:rPr lang="en-US"/>
               <a:t>export-image: ../extracted/figures/&lt;__BASEFILENAME__&gt;_slide&lt;__SLIDENUM__&gt;_fig.png</a:t>
             </a:r>
           </a:p>
-          <a:p>
-            <a:endParaRPr/>
-          </a:p>
+          <a:p/>
           <a:p>
             <a:r>
               <a:t>===BLOCK===</a:t>
@@ -1060,108 +872,65 @@
               <a:t>{{BLOCK:MD:LONG}}</a:t>
             </a:r>
           </a:p>
-          <a:p>
-            <a:endParaRPr/>
-          </a:p>
-          <a:p>
-            <a:r>
-              <a:rPr lang="en-US"/>
+          <a:p/>
+          <a:p>
+            <a:r>
               <a:t>export-note: ../extracted/&lt;__BASEFILENAME__&gt;_slide&lt;__SLIDENUM__&gt;_md.md</a:t>
             </a:r>
           </a:p>
           <a:p>
             <a:r>
-              <a:rPr lang="en-US"/>
               <a:t>{{#id:section:&lt;__BASEFILENAME__&gt;:slide&lt;__SLIDENUM__&gt;}}</a:t>
             </a:r>
           </a:p>
           <a:p>
             <a:r>
-              <a:rPr lang="en-US"/>
               <a:t>## &lt;__TITLE__&gt;</a:t>
             </a:r>
           </a:p>
-          <a:p>
-            <a:endParaRPr/>
-          </a:p>
+          <a:p/>
           <a:p>
             <a:r>
               <a:t>もう1つ、研修テキストを作る時に嬉しいのがシェイプ／スライドの自動削除機能です。 これは、「同じテキストを研修用/講師用で生成し分ける」 ために使えます。</a:t>
             </a:r>
           </a:p>
-          <a:p>
-            <a:endParaRPr/>
-          </a:p>
+          <a:p/>
           <a:p>
             <a:r>
               <a:t>研修テキストというのは、配付資料にすべての情報を載せないのが普通です。人間は自分で書いた情報の方が記憶に残るので、重要な情報は配付資料に載せず受講者自身の手で書かせることが多いのですが、そのために2種類のpptxを作るとこれは 「コピー増殖問題」 そのものであり、整合性を維持するのが非常に面倒です。</a:t>
             </a:r>
           </a:p>
-          <a:p>
-            <a:endParaRPr/>
-          </a:p>
+          <a:p/>
           <a:p>
             <a:r>
               <a:t>そこで、このシェイプ／スライド自動削除機能です。配付資料には載せたくないシェイプ／スライドに特殊マーカーを記入しておくと、オプションひとつでそれを削除したバージョン、残ったバージョンを自動生成可能です。</a:t>
             </a:r>
           </a:p>
-          <a:p>
-            <a:endParaRPr/>
-          </a:p>
-          <a:p>
-            <a:r>
-              <a:t>```{=latex}</a:t>
-            </a:r>
-          </a:p>
-          <a:p>
-            <a:r>
-              <a:t>\begin{center}</a:t>
-            </a:r>
-          </a:p>
-          <a:p>
-            <a:r>
-              <a:t>```</a:t>
-            </a:r>
-          </a:p>
-          <a:p>
-            <a:endParaRPr/>
-          </a:p>
-          <a:p>
-            <a:r>
-              <a:rPr lang="en-US"/>
+          <a:p/>
+          <a:p>
+            <a:r>
+              <a:t>::: {.center}</a:t>
+            </a:r>
+          </a:p>
+          <a:p/>
+          <a:p>
+            <a:r>
               <a:t>![](figures/&lt;__BASEFILENAME__&gt;_slide&lt;__SLIDENUM__&gt;_fig.png){ width=95% }</a:t>
             </a:r>
           </a:p>
-          <a:p>
-            <a:endParaRPr/>
-          </a:p>
-          <a:p>
-            <a:r>
-              <a:t>```{=latex}</a:t>
-            </a:r>
-          </a:p>
-          <a:p>
-            <a:r>
-              <a:t>\end{center}</a:t>
-            </a:r>
-          </a:p>
-          <a:p>
-            <a:r>
-              <a:t>```</a:t>
-            </a:r>
-          </a:p>
-          <a:p>
-            <a:endParaRPr/>
-          </a:p>
+          <a:p/>
+          <a:p>
+            <a:r>
+              <a:t>:::</a:t>
+            </a:r>
+          </a:p>
+          <a:p/>
           <a:p>
             <a:r>
               <a:t>マスターは1つだけで、生成物が変わるだけですから、コピー増殖問題は起きません。</a:t>
             </a:r>
-            <a:endParaRPr lang="en-US"/>
-          </a:p>
-          <a:p>
-            <a:endParaRPr/>
-          </a:p>
+          </a:p>
+          <a:p/>
         </p:txBody>
       </p:sp>
       <p:sp>
@@ -1272,9 +1041,7 @@
               <a:t>NOTE_CONTENT_FORMAT: 1.0</a:t>
             </a:r>
           </a:p>
-          <a:p>
-            <a:endParaRPr/>
-          </a:p>
+          <a:p/>
           <a:p>
             <a:r>
               <a:t>===BLOCK===</a:t>
@@ -1285,9 +1052,7 @@
               <a:t>{{BLOCK:IMAGE}}</a:t>
             </a:r>
           </a:p>
-          <a:p>
-            <a:endParaRPr/>
-          </a:p>
+          <a:p/>
           <a:p>
             <a:r>
               <a:t>export-image-mode: slide_with_rectpct</a:t>
@@ -1300,13 +1065,10 @@
           </a:p>
           <a:p>
             <a:r>
-              <a:rPr lang="en-US"/>
               <a:t>export-image: ../extracted/figures/&lt;__BASEFILENAME__&gt;_slide&lt;__SLIDENUM__&gt;_fig.png</a:t>
             </a:r>
           </a:p>
-          <a:p>
-            <a:endParaRPr/>
-          </a:p>
+          <a:p/>
           <a:p>
             <a:r>
               <a:t>===BLOCK===</a:t>
@@ -1317,108 +1079,65 @@
               <a:t>{{BLOCK:MD:LONG}}</a:t>
             </a:r>
           </a:p>
-          <a:p>
-            <a:endParaRPr/>
-          </a:p>
-          <a:p>
-            <a:r>
-              <a:rPr lang="en-US"/>
+          <a:p/>
+          <a:p>
+            <a:r>
               <a:t>export-note: ../extracted/&lt;__BASEFILENAME__&gt;_slide&lt;__SLIDENUM__&gt;_md.md</a:t>
             </a:r>
           </a:p>
           <a:p>
             <a:r>
-              <a:rPr lang="en-US"/>
               <a:t>{{#id:section:&lt;__BASEFILENAME__&gt;:slide&lt;__SLIDENUM__&gt;}}</a:t>
             </a:r>
           </a:p>
           <a:p>
             <a:r>
-              <a:rPr lang="en-US"/>
               <a:t>## &lt;__TITLE__&gt;</a:t>
             </a:r>
           </a:p>
-          <a:p>
-            <a:endParaRPr/>
-          </a:p>
+          <a:p/>
           <a:p>
             <a:r>
               <a:t>シェイプ/スライド自動削除機能の派生形で、オプションの有無を問わず必ず削除されるシェイプを作る特殊マーカーもあります。</a:t>
             </a:r>
           </a:p>
-          <a:p>
-            <a:endParaRPr/>
-          </a:p>
+          <a:p/>
           <a:p>
             <a:r>
               <a:t>長い研修テキストの制作中には、 「とりあえずたたき台を書いておくけど、必ず直前に最終確認しろ！」 というような事項がどうしても出てくるものです。 紙の資料なら付箋紙を貼るところですがデジタル文書ではそれができない。 そこでパワポ資料では付箋紙代わりに目立つ図形にそうした注意書きを書いて残しておいたりしますが、これは本番資料からは必ず削除しなければならないもの。</a:t>
             </a:r>
           </a:p>
-          <a:p>
-            <a:endParaRPr/>
-          </a:p>
+          <a:p/>
           <a:p>
             <a:r>
               <a:t>ところが・・・そう、残ってしまうことがあるんですね。</a:t>
             </a:r>
           </a:p>
-          <a:p>
-            <a:endParaRPr/>
-          </a:p>
-          <a:p>
-            <a:r>
-              <a:t>```{=latex}</a:t>
-            </a:r>
-          </a:p>
-          <a:p>
-            <a:r>
-              <a:t>\begin{center}</a:t>
-            </a:r>
-          </a:p>
-          <a:p>
-            <a:r>
-              <a:t>```</a:t>
-            </a:r>
-          </a:p>
-          <a:p>
-            <a:endParaRPr/>
-          </a:p>
-          <a:p>
-            <a:r>
-              <a:rPr lang="en-US"/>
+          <a:p/>
+          <a:p>
+            <a:r>
+              <a:t>::: {.center}</a:t>
+            </a:r>
+          </a:p>
+          <a:p/>
+          <a:p>
+            <a:r>
               <a:t>![](figures/&lt;__BASEFILENAME__&gt;_slide&lt;__SLIDENUM__&gt;_fig.png){ width=90% }</a:t>
             </a:r>
           </a:p>
-          <a:p>
-            <a:endParaRPr/>
-          </a:p>
-          <a:p>
-            <a:r>
-              <a:t>```{=latex}</a:t>
-            </a:r>
-          </a:p>
-          <a:p>
-            <a:r>
-              <a:t>\end{center}</a:t>
-            </a:r>
-          </a:p>
-          <a:p>
-            <a:r>
-              <a:t>```</a:t>
-            </a:r>
-          </a:p>
-          <a:p>
-            <a:endParaRPr/>
-          </a:p>
+          <a:p/>
+          <a:p>
+            <a:r>
+              <a:t>:::</a:t>
+            </a:r>
+          </a:p>
+          <a:p/>
           <a:p>
             <a:r>
               <a:t>そこで、この一時メモ用シェイプの自動削除機能です。これを使えば必ず削除されるので安心です。</a:t>
             </a:r>
-            <a:endParaRPr lang="en-US"/>
-          </a:p>
-          <a:p>
-            <a:endParaRPr/>
-          </a:p>
+          </a:p>
+          <a:p/>
         </p:txBody>
       </p:sp>
       <p:sp>
@@ -1511,9 +1230,7 @@
               <a:t>NOTE_CONTENT_FORMAT: 1.0</a:t>
             </a:r>
           </a:p>
-          <a:p>
-            <a:endParaRPr/>
-          </a:p>
+          <a:p/>
           <a:p>
             <a:r>
               <a:t>===BLOCK===</a:t>
@@ -1524,9 +1241,7 @@
               <a:t>{{BLOCK:IMAGE}}</a:t>
             </a:r>
           </a:p>
-          <a:p>
-            <a:endParaRPr/>
-          </a:p>
+          <a:p/>
           <a:p>
             <a:r>
               <a:t>export-image-mode: slide_with_rectpct</a:t>
@@ -1539,13 +1254,10 @@
           </a:p>
           <a:p>
             <a:r>
-              <a:rPr lang="en-US"/>
               <a:t>export-image: ../extracted/figures/&lt;__BASEFILENAME__&gt;_slide&lt;__SLIDENUM__&gt;_fig.png</a:t>
             </a:r>
           </a:p>
-          <a:p>
-            <a:endParaRPr/>
-          </a:p>
+          <a:p/>
           <a:p>
             <a:r>
               <a:t>===BLOCK===</a:t>
@@ -1556,30 +1268,23 @@
               <a:t>{{BLOCK:MD:LONG}}</a:t>
             </a:r>
           </a:p>
-          <a:p>
-            <a:endParaRPr/>
-          </a:p>
-          <a:p>
-            <a:r>
-              <a:rPr lang="en-US"/>
+          <a:p/>
+          <a:p>
+            <a:r>
               <a:t>export-note: ../extracted/&lt;__BASEFILENAME__&gt;_slide&lt;__SLIDENUM__&gt;_md.md</a:t>
             </a:r>
           </a:p>
           <a:p>
             <a:r>
-              <a:rPr lang="en-US"/>
               <a:t>{{#id:section:&lt;__BASEFILENAME__&gt;:slide&lt;__SLIDENUM__&gt;}}</a:t>
             </a:r>
           </a:p>
           <a:p>
             <a:r>
-              <a:rPr lang="en-US"/>
               <a:t>## &lt;__TITLE__&gt;</a:t>
             </a:r>
           </a:p>
-          <a:p>
-            <a:endParaRPr/>
-          </a:p>
+          <a:p/>
           <a:p>
             <a:r>
               <a:t>なお、PPT&amp;MD merger は大まかに PPTX生成と他形式（PDF,MD,HTML)生成の２つの機能に分かれています。 PPTX生成はPPTX形式だけで完結しますが、他形式生成のほうはいったんMarkdown形式を出力して結合するので別系統の機能として構築したもので、設定方法等も少々複雑です。</a:t>
@@ -1587,78 +1292,34 @@
           </a:p>
           <a:p>
             <a:r>
-              <a:t>現時点で詳しい（図版つき）機能解説を用意しているのはPPTX生成の範囲のみで、他形式分については準備中です。ただし、他形式生成も図版つき解説がないだけで、機能としては動いているので、詳細スペック文書やサンプルを読んでいただけば、使い方は察しがつくかもしれません。</a:t>
-            </a:r>
-            <a:r>
-              <a:rPr lang="ja-JP" altLang="en-US"/>
-              <a:t>（かもしれません・・・・・保証はしない</a:t>
-            </a:r>
-            <a:r>
-              <a:rPr lang="en-US" altLang="ja-JP"/>
-              <a:t>(^_^;)</a:t>
-            </a:r>
-            <a:r>
-              <a:rPr lang="ja-JP" altLang="en-US"/>
-              <a:t>　まあ、おいおい書きますよ）</a:t>
-            </a:r>
-            <a:endParaRPr/>
-          </a:p>
-          <a:p>
-            <a:endParaRPr/>
-          </a:p>
-          <a:p>
-            <a:r>
-              <a:t>```{=latex}</a:t>
-            </a:r>
-          </a:p>
-          <a:p>
-            <a:r>
-              <a:t>\begin{center}</a:t>
-            </a:r>
-          </a:p>
-          <a:p>
-            <a:r>
-              <a:t>```</a:t>
-            </a:r>
-          </a:p>
-          <a:p>
-            <a:endParaRPr/>
-          </a:p>
-          <a:p>
-            <a:r>
-              <a:rPr lang="en-US"/>
+              <a:t>現時点で詳しい（図版つき）機能解説を用意しているのはPPTX生成の範囲のみで、他形式分については準備中です。ただし、他形式生成も図版つき解説がないだけで、機能としては動いているので、詳細スペック文書やサンプルを読んでいただけば、使い方は察しがつくかもしれません。（かもしれません・・・・・保証はしない(^_^;)　まあ、おいおい書きますよ）</a:t>
+            </a:r>
+          </a:p>
+          <a:p/>
+          <a:p>
+            <a:r>
+              <a:t>::: {.center}</a:t>
+            </a:r>
+          </a:p>
+          <a:p/>
+          <a:p>
+            <a:r>
               <a:t>![](figures/&lt;__BASEFILENAME__&gt;_slide&lt;__SLIDENUM__&gt;_fig.png){ width=95% }</a:t>
             </a:r>
           </a:p>
-          <a:p>
-            <a:endParaRPr/>
-          </a:p>
-          <a:p>
-            <a:r>
-              <a:t>```{=latex}</a:t>
-            </a:r>
-          </a:p>
-          <a:p>
-            <a:r>
-              <a:t>\end{center}</a:t>
-            </a:r>
-          </a:p>
-          <a:p>
-            <a:r>
-              <a:t>```</a:t>
-            </a:r>
-          </a:p>
-          <a:p>
-            <a:endParaRPr/>
-          </a:p>
+          <a:p/>
+          <a:p>
+            <a:r>
+              <a:t>:::</a:t>
+            </a:r>
+          </a:p>
+          <a:p/>
           <a:p>
             <a:r>
               <a:t>以下、PPTX生成機能の詳細解説、および他形式生成機能も含む詳細スペック文書へのリンク一覧です。　しかし、「詳細を読むよりまず試しに使ってみたい」　という場合はこの後の Quick Start をご覧ください。</a:t>
             </a:r>
           </a:p>
-          <a:p>
-            <a:endParaRPr/>
-          </a:p>
+          <a:p/>
         </p:txBody>
       </p:sp>
       <p:sp>
@@ -3162,9 +2823,7 @@
               <a:t>NOTE_CONTENT_FORMAT: 1.0</a:t>
             </a:r>
           </a:p>
-          <a:p>
-            <a:endParaRPr/>
-          </a:p>
+          <a:p/>
           <a:p>
             <a:r>
               <a:t>===BLOCK===</a:t>
@@ -3175,9 +2834,7 @@
               <a:t>{{BLOCK:IMAGE}}</a:t>
             </a:r>
           </a:p>
-          <a:p>
-            <a:endParaRPr/>
-          </a:p>
+          <a:p/>
           <a:p>
             <a:r>
               <a:t>export-image-mode: </a:t>
@@ -3193,9 +2850,7 @@
               <a:t>export-image: </a:t>
             </a:r>
           </a:p>
-          <a:p>
-            <a:endParaRPr/>
-          </a:p>
+          <a:p/>
           <a:p>
             <a:r>
               <a:t>===BLOCK===</a:t>
@@ -3206,2451 +2861,405 @@
               <a:t>{{BLOCK:MD:LONG}}</a:t>
             </a:r>
           </a:p>
-          <a:p>
-            <a:endParaRPr lang="en-US"/>
-          </a:p>
-          <a:p>
-            <a:r>
-              <a:rPr lang="en-US"/>
+          <a:p/>
+          <a:p>
+            <a:r>
               <a:t>export-note: ../extracted/&lt;__BASEFILENAME__&gt;_slide&lt;__SLIDENUM__&gt;_md.md</a:t>
             </a:r>
           </a:p>
           <a:p>
             <a:r>
-              <a:rPr lang="en-US"/>
               <a:t>{{#id:section:&lt;__BASEFILENAME__&gt;:slide&lt;__SLIDENUM__&gt;}}</a:t>
             </a:r>
           </a:p>
           <a:p>
             <a:r>
-              <a:rPr lang="en-US"/>
               <a:t>## &lt;__TITLE__&gt;</a:t>
             </a:r>
           </a:p>
-          <a:p>
-            <a:endParaRPr lang="en-US"/>
-          </a:p>
-          <a:p>
-            <a:r>
-              <a:rPr lang="en-US"/>
-              <a:t>### </a:t>
-            </a:r>
-            <a:r>
-              <a:rPr lang="ja-JP" altLang="en-US"/>
-              <a:t>単純マージ</a:t>
-            </a:r>
-            <a:endParaRPr lang="en-US" altLang="ja-JP"/>
-          </a:p>
-          <a:p>
-            <a:endParaRPr/>
-          </a:p>
-          <a:p>
-            <a:r>
-              <a:rPr lang="ja-JP" altLang="en-US"/>
+          <a:p/>
+          <a:p>
+            <a:r>
+              <a:t>### 単純マージ</a:t>
+            </a:r>
+          </a:p>
+          <a:p/>
+          <a:p>
+            <a:r>
               <a:t>２つのファイルを単純に結合するサンプルです。</a:t>
             </a:r>
-            <a:endParaRPr lang="en-US"/>
-          </a:p>
-          <a:p>
-            <a:endParaRPr lang="en-US" altLang="ja-JP"/>
-          </a:p>
-          <a:p>
-            <a:r>
-              <a:rPr lang="ja-JP" altLang="en-US"/>
-              <a:t>サンプルフォルダ：　</a:t>
-            </a:r>
-            <a:r>
-              <a:rPr lang="en-US" altLang="ja-JP"/>
-              <a:t>pm1_simple_ppt_merge</a:t>
-            </a:r>
-          </a:p>
-          <a:p>
-            <a:endParaRPr lang="en-US"/>
-          </a:p>
-          <a:p>
-            <a:r>
-              <a:rPr kumimoji="1" lang="en-US" altLang="ja-JP" sz="1200" b="0" kern="1200">
-                <a:solidFill>
-                  <a:schemeClr val="tx1"/>
-                </a:solidFill>
-                <a:effectLst/>
-                <a:latin typeface="BIZ UDPゴシック" panose="020B0400000000000000" pitchFamily="50" charset="-128"/>
-                <a:ea typeface="BIZ UDPゴシック" panose="020B0400000000000000" pitchFamily="50" charset="-128"/>
-                <a:cs typeface="+mn-cs"/>
-              </a:rPr>
-              <a:t>[![</a:t>
-            </a:r>
-            <a:r>
-              <a:rPr kumimoji="1" lang="ja-JP" altLang="en-US" sz="1200" b="0" kern="1200">
-                <a:solidFill>
-                  <a:schemeClr val="tx1"/>
-                </a:solidFill>
-                <a:effectLst/>
-                <a:latin typeface="BIZ UDPゴシック" panose="020B0400000000000000" pitchFamily="50" charset="-128"/>
-                <a:ea typeface="BIZ UDPゴシック" panose="020B0400000000000000" pitchFamily="50" charset="-128"/>
-                <a:cs typeface="+mn-cs"/>
-              </a:rPr>
-              <a:t>サンプル：単純マージ</a:t>
-            </a:r>
-            <a:r>
-              <a:rPr kumimoji="1" lang="en-US" altLang="ja-JP" sz="1200" b="0" kern="1200">
-                <a:solidFill>
-                  <a:schemeClr val="tx1"/>
-                </a:solidFill>
-                <a:effectLst/>
-                <a:latin typeface="BIZ UDPゴシック" panose="020B0400000000000000" pitchFamily="50" charset="-128"/>
-                <a:ea typeface="BIZ UDPゴシック" panose="020B0400000000000000" pitchFamily="50" charset="-128"/>
-                <a:cs typeface="+mn-cs"/>
-              </a:rPr>
-              <a:t>](../../pm1_simple_ppt_merge/build/figures/simple_ppt_merge_guide_keyvisual.png/)</a:t>
-            </a:r>
-            <a:r>
-              <a:rPr lang="en-US" altLang="ja-JP"/>
-              <a:t>{ width=60% }</a:t>
-            </a:r>
-            <a:r>
-              <a:rPr kumimoji="1" lang="en-US" altLang="ja-JP" sz="1200" b="0" kern="1200">
-                <a:solidFill>
-                  <a:schemeClr val="tx1"/>
-                </a:solidFill>
-                <a:effectLst/>
-                <a:latin typeface="BIZ UDPゴシック" panose="020B0400000000000000" pitchFamily="50" charset="-128"/>
-                <a:ea typeface="BIZ UDPゴシック" panose="020B0400000000000000" pitchFamily="50" charset="-128"/>
-                <a:cs typeface="+mn-cs"/>
-              </a:rPr>
-              <a:t>](../../pm1_simple_ppt_merge/README.md)</a:t>
-            </a:r>
-          </a:p>
-          <a:p>
-            <a:pPr marL="0" marR="0" lvl="0" indent="0" algn="l" defTabSz="914400" rtl="0" eaLnBrk="1" fontAlgn="auto" latinLnBrk="0" hangingPunct="1">
-              <a:lnSpc>
-                <a:spcPct val="100000"/>
-              </a:lnSpc>
-              <a:spcBef>
-                <a:spcPts val="0"/>
-              </a:spcBef>
-              <a:spcAft>
-                <a:spcPts val="0"/>
-              </a:spcAft>
-              <a:buClrTx/>
-              <a:buSzTx/>
-              <a:buFontTx/>
-              <a:buNone/>
-              <a:tabLst/>
-              <a:defRPr/>
-            </a:pPr>
-            <a:br>
-              <a:rPr kumimoji="1" lang="en-US" altLang="ja-JP" sz="1200" b="0" kern="1200">
-                <a:solidFill>
-                  <a:schemeClr val="tx1"/>
-                </a:solidFill>
-                <a:effectLst/>
-                <a:latin typeface="BIZ UDPゴシック" panose="020B0400000000000000" pitchFamily="50" charset="-128"/>
-                <a:ea typeface="BIZ UDPゴシック" panose="020B0400000000000000" pitchFamily="50" charset="-128"/>
-                <a:cs typeface="+mn-cs"/>
-              </a:rPr>
-            </a:br>
-            <a:r>
-              <a:rPr lang="en-US" altLang="ja-JP"/>
-              <a:t>```{=latex}</a:t>
-            </a:r>
-          </a:p>
-          <a:p>
-            <a:r>
-              <a:rPr lang="en-US" altLang="ja-JP"/>
-              <a:t>\par\vspace{5\baselineskip}</a:t>
-            </a:r>
-          </a:p>
-          <a:p>
-            <a:r>
-              <a:rPr lang="en-US" altLang="ja-JP"/>
-              <a:t>```</a:t>
-            </a:r>
-          </a:p>
-          <a:p>
-            <a:pPr marL="0" marR="0" lvl="0" indent="0" algn="l" defTabSz="914400" rtl="0" eaLnBrk="1" fontAlgn="auto" latinLnBrk="0" hangingPunct="1">
-              <a:lnSpc>
-                <a:spcPct val="100000"/>
-              </a:lnSpc>
-              <a:spcBef>
-                <a:spcPts val="0"/>
-              </a:spcBef>
-              <a:spcAft>
-                <a:spcPts val="0"/>
-              </a:spcAft>
-              <a:buClrTx/>
-              <a:buSzTx/>
-              <a:buFontTx/>
-              <a:buNone/>
-              <a:tabLst/>
-              <a:defRPr/>
-            </a:pPr>
-            <a:endParaRPr lang="en-US" altLang="ja-JP"/>
-          </a:p>
-          <a:p>
-            <a:r>
-              <a:rPr lang="en-US" altLang="ja-JP"/>
-              <a:t>### </a:t>
-            </a:r>
-            <a:r>
-              <a:rPr lang="ja-JP" altLang="en-US"/>
-              <a:t>簡易ナンバリング</a:t>
-            </a:r>
-            <a:endParaRPr lang="en-US" altLang="ja-JP"/>
-          </a:p>
-          <a:p>
-            <a:endParaRPr lang="ja-JP" altLang="en-US"/>
-          </a:p>
-          <a:p>
-            <a:r>
-              <a:rPr lang="en-US" altLang="ja-JP"/>
-              <a:t>2</a:t>
-            </a:r>
-            <a:r>
-              <a:rPr lang="ja-JP" altLang="en-US"/>
-              <a:t>つの </a:t>
-            </a:r>
-            <a:r>
-              <a:rPr lang="en-US" altLang="ja-JP"/>
-              <a:t>pptx </a:t>
-            </a:r>
-            <a:r>
-              <a:rPr lang="ja-JP" altLang="en-US"/>
-              <a:t>ファイルを結合してファイル単位で </a:t>
-            </a:r>
-            <a:r>
-              <a:rPr lang="en-US" altLang="ja-JP"/>
-              <a:t>chapter </a:t>
-            </a:r>
-            <a:r>
-              <a:rPr lang="ja-JP" altLang="en-US"/>
-              <a:t>としてナンバリングする機能のサンプルです。</a:t>
-            </a:r>
-          </a:p>
-          <a:p>
-            <a:endParaRPr lang="ja-JP" altLang="en-US"/>
-          </a:p>
-          <a:p>
-            <a:r>
-              <a:rPr lang="ja-JP" altLang="en-US"/>
-              <a:t>サンプルフォルダ：　</a:t>
-            </a:r>
-            <a:r>
-              <a:rPr lang="en-US" altLang="ja-JP"/>
-              <a:t>pm2_simple_numbering</a:t>
-            </a:r>
-          </a:p>
-          <a:p>
-            <a:endParaRPr lang="en-US" altLang="ja-JP"/>
-          </a:p>
-          <a:p>
-            <a:r>
-              <a:rPr kumimoji="1" lang="en-US" altLang="ja-JP" sz="1200" b="0" kern="1200">
-                <a:solidFill>
-                  <a:schemeClr val="tx1"/>
-                </a:solidFill>
-                <a:effectLst/>
-                <a:latin typeface="BIZ UDPゴシック" panose="020B0400000000000000" pitchFamily="50" charset="-128"/>
-                <a:ea typeface="BIZ UDPゴシック" panose="020B0400000000000000" pitchFamily="50" charset="-128"/>
-                <a:cs typeface="+mn-cs"/>
-              </a:rPr>
-              <a:t>[![</a:t>
-            </a:r>
-            <a:r>
-              <a:rPr kumimoji="1" lang="ja-JP" altLang="en-US" sz="1200" b="0" kern="1200">
-                <a:solidFill>
-                  <a:schemeClr val="tx1"/>
-                </a:solidFill>
-                <a:effectLst/>
-                <a:latin typeface="BIZ UDPゴシック" panose="020B0400000000000000" pitchFamily="50" charset="-128"/>
-                <a:ea typeface="BIZ UDPゴシック" panose="020B0400000000000000" pitchFamily="50" charset="-128"/>
-                <a:cs typeface="+mn-cs"/>
-              </a:rPr>
-              <a:t>サンプル：</a:t>
-            </a:r>
-            <a:r>
-              <a:rPr lang="ja-JP" altLang="en-US"/>
-              <a:t>簡易ナンバリング</a:t>
-            </a:r>
-            <a:r>
-              <a:rPr kumimoji="1" lang="en-US" altLang="ja-JP" sz="1200" b="0" kern="1200">
-                <a:solidFill>
-                  <a:schemeClr val="tx1"/>
-                </a:solidFill>
-                <a:effectLst/>
-                <a:latin typeface="BIZ UDPゴシック" panose="020B0400000000000000" pitchFamily="50" charset="-128"/>
-                <a:ea typeface="BIZ UDPゴシック" panose="020B0400000000000000" pitchFamily="50" charset="-128"/>
-                <a:cs typeface="+mn-cs"/>
-              </a:rPr>
-              <a:t>](../../</a:t>
-            </a:r>
-            <a:r>
-              <a:rPr lang="en-US" altLang="ja-JP"/>
-              <a:t>pm2_simple_numbering</a:t>
-            </a:r>
-            <a:r>
-              <a:rPr kumimoji="1" lang="en-US" altLang="ja-JP" sz="1200" b="0" kern="1200">
-                <a:solidFill>
-                  <a:schemeClr val="tx1"/>
-                </a:solidFill>
-                <a:effectLst/>
-                <a:latin typeface="BIZ UDPゴシック" panose="020B0400000000000000" pitchFamily="50" charset="-128"/>
-                <a:ea typeface="BIZ UDPゴシック" panose="020B0400000000000000" pitchFamily="50" charset="-128"/>
-                <a:cs typeface="+mn-cs"/>
-              </a:rPr>
-              <a:t>/build/figures/</a:t>
-            </a:r>
-            <a:r>
-              <a:rPr lang="en-US" altLang="ja-JP"/>
-              <a:t>simple_numbering_</a:t>
-            </a:r>
-            <a:r>
-              <a:rPr kumimoji="1" lang="en-US" altLang="ja-JP" sz="1200" b="0" kern="1200">
-                <a:solidFill>
-                  <a:schemeClr val="tx1"/>
-                </a:solidFill>
-                <a:effectLst/>
-                <a:latin typeface="BIZ UDPゴシック" panose="020B0400000000000000" pitchFamily="50" charset="-128"/>
-                <a:ea typeface="BIZ UDPゴシック" panose="020B0400000000000000" pitchFamily="50" charset="-128"/>
-                <a:cs typeface="+mn-cs"/>
-              </a:rPr>
-              <a:t>guide_keyvisual.png/)</a:t>
-            </a:r>
-            <a:r>
-              <a:rPr lang="en-US" altLang="ja-JP"/>
-              <a:t>{ width=70% }</a:t>
-            </a:r>
-            <a:r>
-              <a:rPr kumimoji="1" lang="en-US" altLang="ja-JP" sz="1200" b="0" kern="1200">
-                <a:solidFill>
-                  <a:schemeClr val="tx1"/>
-                </a:solidFill>
-                <a:effectLst/>
-                <a:latin typeface="BIZ UDPゴシック" panose="020B0400000000000000" pitchFamily="50" charset="-128"/>
-                <a:ea typeface="BIZ UDPゴシック" panose="020B0400000000000000" pitchFamily="50" charset="-128"/>
-                <a:cs typeface="+mn-cs"/>
-              </a:rPr>
-              <a:t>](../../</a:t>
-            </a:r>
-            <a:r>
-              <a:rPr lang="en-US" altLang="ja-JP"/>
-              <a:t>pm2_simple_numbering</a:t>
-            </a:r>
-            <a:r>
-              <a:rPr kumimoji="1" lang="en-US" altLang="ja-JP" sz="1200" b="0" kern="1200">
-                <a:solidFill>
-                  <a:schemeClr val="tx1"/>
-                </a:solidFill>
-                <a:effectLst/>
-                <a:latin typeface="BIZ UDPゴシック" panose="020B0400000000000000" pitchFamily="50" charset="-128"/>
-                <a:ea typeface="BIZ UDPゴシック" panose="020B0400000000000000" pitchFamily="50" charset="-128"/>
-                <a:cs typeface="+mn-cs"/>
-              </a:rPr>
-              <a:t>/README.md)</a:t>
-            </a:r>
-          </a:p>
-          <a:p>
-            <a:pPr marL="0" marR="0" lvl="0" indent="0" algn="l" defTabSz="914400" rtl="0" eaLnBrk="1" fontAlgn="auto" latinLnBrk="0" hangingPunct="1">
-              <a:lnSpc>
-                <a:spcPct val="100000"/>
-              </a:lnSpc>
-              <a:spcBef>
-                <a:spcPts val="0"/>
-              </a:spcBef>
-              <a:spcAft>
-                <a:spcPts val="0"/>
-              </a:spcAft>
-              <a:buClrTx/>
-              <a:buSzTx/>
-              <a:buFontTx/>
-              <a:buNone/>
-              <a:tabLst/>
-              <a:defRPr/>
-            </a:pPr>
-            <a:br>
-              <a:rPr kumimoji="1" lang="en-US" altLang="ja-JP" sz="1200" b="0" kern="1200">
-                <a:solidFill>
-                  <a:schemeClr val="tx1"/>
-                </a:solidFill>
-                <a:effectLst/>
-                <a:latin typeface="BIZ UDPゴシック" panose="020B0400000000000000" pitchFamily="50" charset="-128"/>
-                <a:ea typeface="BIZ UDPゴシック" panose="020B0400000000000000" pitchFamily="50" charset="-128"/>
-                <a:cs typeface="+mn-cs"/>
-              </a:rPr>
-            </a:br>
-            <a:br>
-              <a:rPr kumimoji="1" lang="en-US" altLang="ja-JP" sz="1200" b="0" kern="1200">
-                <a:solidFill>
-                  <a:schemeClr val="tx1"/>
-                </a:solidFill>
-                <a:effectLst/>
-                <a:latin typeface="BIZ UDPゴシック" panose="020B0400000000000000" pitchFamily="50" charset="-128"/>
-                <a:ea typeface="BIZ UDPゴシック" panose="020B0400000000000000" pitchFamily="50" charset="-128"/>
-                <a:cs typeface="+mn-cs"/>
-              </a:rPr>
-            </a:br>
-            <a:r>
-              <a:rPr lang="en-US" altLang="ja-JP"/>
-              <a:t>```{=latex}</a:t>
-            </a:r>
-          </a:p>
-          <a:p>
-            <a:r>
-              <a:rPr lang="en-US" altLang="ja-JP"/>
-              <a:t>\vfill</a:t>
-            </a:r>
-          </a:p>
-          <a:p>
-            <a:r>
-              <a:rPr lang="en-US" altLang="ja-JP"/>
-              <a:t>\newpage</a:t>
-            </a:r>
-          </a:p>
-          <a:p>
-            <a:pPr marL="0" marR="0" lvl="0" indent="0" algn="l" defTabSz="914400" rtl="0" eaLnBrk="1" fontAlgn="auto" latinLnBrk="0" hangingPunct="1">
-              <a:lnSpc>
-                <a:spcPct val="100000"/>
-              </a:lnSpc>
-              <a:spcBef>
-                <a:spcPts val="0"/>
-              </a:spcBef>
-              <a:spcAft>
-                <a:spcPts val="0"/>
-              </a:spcAft>
-              <a:buClrTx/>
-              <a:buSzTx/>
-              <a:buFontTx/>
-              <a:buNone/>
-              <a:tabLst/>
-              <a:defRPr/>
-            </a:pPr>
-            <a:r>
-              <a:rPr lang="en-US" altLang="ja-JP"/>
-              <a:t>```</a:t>
-            </a:r>
-          </a:p>
-          <a:p>
-            <a:endParaRPr kumimoji="1" lang="en-US" altLang="ja-JP" sz="1200" b="0" kern="1200">
-              <a:solidFill>
-                <a:schemeClr val="tx1"/>
-              </a:solidFill>
-              <a:effectLst/>
-              <a:latin typeface="BIZ UDPゴシック" panose="020B0400000000000000" pitchFamily="50" charset="-128"/>
-              <a:ea typeface="BIZ UDPゴシック" panose="020B0400000000000000" pitchFamily="50" charset="-128"/>
-              <a:cs typeface="+mn-cs"/>
-            </a:endParaRPr>
-          </a:p>
-          <a:p>
-            <a:r>
-              <a:rPr lang="en-US" altLang="ja-JP"/>
-              <a:t>### </a:t>
-            </a:r>
-            <a:r>
-              <a:rPr kumimoji="1" lang="en-US" altLang="ja-JP"/>
-              <a:t>chapter_marker </a:t>
-            </a:r>
-            <a:r>
-              <a:rPr kumimoji="1" lang="ja-JP" altLang="en-US"/>
-              <a:t>によるナンバリング</a:t>
-            </a:r>
-            <a:endParaRPr lang="en-US" altLang="ja-JP"/>
-          </a:p>
-          <a:p>
-            <a:endParaRPr lang="ja-JP" altLang="en-US"/>
-          </a:p>
-          <a:p>
-            <a:r>
-              <a:rPr lang="ja-JP" altLang="en-US"/>
-              <a:t>スライド上に埋め込んだ特殊文字列 </a:t>
-            </a:r>
-            <a:r>
-              <a:rPr lang="en-US" altLang="ja-JP"/>
-              <a:t>#CHAPT#, #SECTION# </a:t>
-            </a:r>
-            <a:r>
-              <a:rPr lang="ja-JP" altLang="en-US"/>
-              <a:t>で章・節番号のカウントを行う方法のサンプルです。</a:t>
-            </a:r>
-          </a:p>
-          <a:p>
-            <a:endParaRPr lang="ja-JP" altLang="en-US"/>
-          </a:p>
-          <a:p>
-            <a:r>
-              <a:rPr lang="ja-JP" altLang="en-US"/>
-              <a:t>サンプルフォルダ：　</a:t>
-            </a:r>
-            <a:r>
-              <a:rPr lang="en-US" altLang="ja-JP"/>
-              <a:t>pm3_chapter_marker_numbering</a:t>
-            </a:r>
-          </a:p>
-          <a:p>
-            <a:endParaRPr lang="en-US" altLang="ja-JP"/>
-          </a:p>
-          <a:p>
-            <a:r>
-              <a:rPr kumimoji="1" lang="en-US" altLang="ja-JP" sz="1200" b="0" kern="1200">
-                <a:solidFill>
-                  <a:schemeClr val="tx1"/>
-                </a:solidFill>
-                <a:effectLst/>
-                <a:latin typeface="BIZ UDPゴシック" panose="020B0400000000000000" pitchFamily="50" charset="-128"/>
-                <a:ea typeface="BIZ UDPゴシック" panose="020B0400000000000000" pitchFamily="50" charset="-128"/>
-                <a:cs typeface="+mn-cs"/>
-              </a:rPr>
-              <a:t>[![</a:t>
-            </a:r>
-            <a:r>
-              <a:rPr kumimoji="1" lang="ja-JP" altLang="en-US" sz="1200" b="0" kern="1200">
-                <a:solidFill>
-                  <a:schemeClr val="tx1"/>
-                </a:solidFill>
-                <a:effectLst/>
-                <a:latin typeface="BIZ UDPゴシック" panose="020B0400000000000000" pitchFamily="50" charset="-128"/>
-                <a:ea typeface="BIZ UDPゴシック" panose="020B0400000000000000" pitchFamily="50" charset="-128"/>
-                <a:cs typeface="+mn-cs"/>
-              </a:rPr>
-              <a:t>サンプル：</a:t>
-            </a:r>
-            <a:r>
-              <a:rPr kumimoji="1" lang="en-US" altLang="ja-JP"/>
-              <a:t>chapter_marker </a:t>
-            </a:r>
-            <a:r>
-              <a:rPr kumimoji="1" lang="ja-JP" altLang="en-US"/>
-              <a:t>によるナンバリング</a:t>
-            </a:r>
-            <a:r>
-              <a:rPr kumimoji="1" lang="en-US" altLang="ja-JP" sz="1200" b="0" kern="1200">
-                <a:solidFill>
-                  <a:schemeClr val="tx1"/>
-                </a:solidFill>
-                <a:effectLst/>
-                <a:latin typeface="BIZ UDPゴシック" panose="020B0400000000000000" pitchFamily="50" charset="-128"/>
-                <a:ea typeface="BIZ UDPゴシック" panose="020B0400000000000000" pitchFamily="50" charset="-128"/>
-                <a:cs typeface="+mn-cs"/>
-              </a:rPr>
-              <a:t>](../../</a:t>
-            </a:r>
-            <a:r>
-              <a:rPr lang="en-US" altLang="ja-JP"/>
-              <a:t>pm3_chapter_marker_numbering</a:t>
-            </a:r>
-            <a:r>
-              <a:rPr kumimoji="1" lang="en-US" altLang="ja-JP" sz="1200" b="0" kern="1200">
-                <a:solidFill>
-                  <a:schemeClr val="tx1"/>
-                </a:solidFill>
-                <a:effectLst/>
-                <a:latin typeface="BIZ UDPゴシック" panose="020B0400000000000000" pitchFamily="50" charset="-128"/>
-                <a:ea typeface="BIZ UDPゴシック" panose="020B0400000000000000" pitchFamily="50" charset="-128"/>
-                <a:cs typeface="+mn-cs"/>
-              </a:rPr>
-              <a:t>/build/figures/</a:t>
-            </a:r>
-            <a:r>
-              <a:rPr lang="en-US" altLang="ja-JP"/>
-              <a:t>chapter_marker_numbering_</a:t>
-            </a:r>
-            <a:r>
-              <a:rPr kumimoji="1" lang="en-US" altLang="ja-JP" sz="1200" b="0" kern="1200">
-                <a:solidFill>
-                  <a:schemeClr val="tx1"/>
-                </a:solidFill>
-                <a:effectLst/>
-                <a:latin typeface="BIZ UDPゴシック" panose="020B0400000000000000" pitchFamily="50" charset="-128"/>
-                <a:ea typeface="BIZ UDPゴシック" panose="020B0400000000000000" pitchFamily="50" charset="-128"/>
-                <a:cs typeface="+mn-cs"/>
-              </a:rPr>
-              <a:t>guide_keyvisual.png/)</a:t>
-            </a:r>
-            <a:r>
-              <a:rPr lang="en-US" altLang="ja-JP"/>
-              <a:t>{ width=90% }</a:t>
-            </a:r>
-            <a:r>
-              <a:rPr kumimoji="1" lang="en-US" altLang="ja-JP" sz="1200" b="0" kern="1200">
-                <a:solidFill>
-                  <a:schemeClr val="tx1"/>
-                </a:solidFill>
-                <a:effectLst/>
-                <a:latin typeface="BIZ UDPゴシック" panose="020B0400000000000000" pitchFamily="50" charset="-128"/>
-                <a:ea typeface="BIZ UDPゴシック" panose="020B0400000000000000" pitchFamily="50" charset="-128"/>
-                <a:cs typeface="+mn-cs"/>
-              </a:rPr>
-              <a:t>](../../</a:t>
-            </a:r>
-            <a:r>
-              <a:rPr lang="en-US" altLang="ja-JP"/>
-              <a:t>pm3_chapter_marker_numbering</a:t>
-            </a:r>
-            <a:r>
-              <a:rPr kumimoji="1" lang="en-US" altLang="ja-JP" sz="1200" b="0" kern="1200">
-                <a:solidFill>
-                  <a:schemeClr val="tx1"/>
-                </a:solidFill>
-                <a:effectLst/>
-                <a:latin typeface="BIZ UDPゴシック" panose="020B0400000000000000" pitchFamily="50" charset="-128"/>
-                <a:ea typeface="BIZ UDPゴシック" panose="020B0400000000000000" pitchFamily="50" charset="-128"/>
-                <a:cs typeface="+mn-cs"/>
-              </a:rPr>
-              <a:t>/README.md)</a:t>
-            </a:r>
-          </a:p>
-          <a:p>
-            <a:br>
-              <a:rPr kumimoji="1" lang="en-US" altLang="ja-JP" sz="1200" b="0" kern="1200">
-                <a:solidFill>
-                  <a:schemeClr val="tx1"/>
-                </a:solidFill>
-                <a:effectLst/>
-                <a:latin typeface="BIZ UDPゴシック" panose="020B0400000000000000" pitchFamily="50" charset="-128"/>
-                <a:ea typeface="BIZ UDPゴシック" panose="020B0400000000000000" pitchFamily="50" charset="-128"/>
-                <a:cs typeface="+mn-cs"/>
-              </a:rPr>
-            </a:br>
-            <a:br>
-              <a:rPr kumimoji="1" lang="en-US" altLang="ja-JP" sz="1200" b="0" kern="1200">
-                <a:solidFill>
-                  <a:schemeClr val="tx1"/>
-                </a:solidFill>
-                <a:effectLst/>
-                <a:latin typeface="BIZ UDPゴシック" panose="020B0400000000000000" pitchFamily="50" charset="-128"/>
-                <a:ea typeface="BIZ UDPゴシック" panose="020B0400000000000000" pitchFamily="50" charset="-128"/>
-                <a:cs typeface="+mn-cs"/>
-              </a:rPr>
-            </a:br>
-            <a:r>
-              <a:rPr lang="en-US" altLang="ja-JP"/>
-              <a:t>```{=latex}</a:t>
-            </a:r>
-          </a:p>
-          <a:p>
-            <a:r>
-              <a:rPr lang="en-US" altLang="ja-JP"/>
-              <a:t>\par\vspace{5\baselineskip}</a:t>
-            </a:r>
-          </a:p>
-          <a:p>
-            <a:pPr marL="0" marR="0" lvl="0" indent="0" algn="l" defTabSz="914400" rtl="0" eaLnBrk="1" fontAlgn="auto" latinLnBrk="0" hangingPunct="1">
-              <a:lnSpc>
-                <a:spcPct val="100000"/>
-              </a:lnSpc>
-              <a:spcBef>
-                <a:spcPts val="0"/>
-              </a:spcBef>
-              <a:spcAft>
-                <a:spcPts val="0"/>
-              </a:spcAft>
-              <a:buClrTx/>
-              <a:buSzTx/>
-              <a:buFontTx/>
-              <a:buNone/>
-              <a:tabLst/>
-              <a:defRPr/>
-            </a:pPr>
-            <a:r>
-              <a:rPr lang="en-US" altLang="ja-JP"/>
-              <a:t>```</a:t>
-            </a:r>
-          </a:p>
-          <a:p>
-            <a:endParaRPr lang="en-US"/>
-          </a:p>
-          <a:p>
-            <a:r>
-              <a:rPr lang="en-US" altLang="ja-JP"/>
-              <a:t>### </a:t>
-            </a:r>
-            <a:r>
-              <a:rPr lang="ja-JP" altLang="en-US"/>
-              <a:t>スライド中の変数置換</a:t>
-            </a:r>
-            <a:endParaRPr lang="en-US" altLang="ja-JP"/>
-          </a:p>
-          <a:p>
-            <a:endParaRPr lang="ja-JP" altLang="en-US"/>
-          </a:p>
-          <a:p>
-            <a:r>
-              <a:rPr lang="ja-JP" altLang="en-US"/>
+          </a:p>
+          <a:p/>
+          <a:p>
+            <a:r>
+              <a:t>サンプルフォルダ：　pm1_simple_ppt_merge</a:t>
+            </a:r>
+          </a:p>
+          <a:p/>
+          <a:p>
+            <a:r>
+              <a:t>[![サンプル：単純マージ](../../pm1_simple_ppt_merge/build/figures/simple_ppt_merge_guide_keyvisual.png/){ width=60% }](../../pm1_simple_ppt_merge/README.md)</a:t>
+            </a:r>
+          </a:p>
+          <a:p/>
+          <a:p>
+            <a:r>
+              <a:t>{{vspace:5}}</a:t>
+            </a:r>
+          </a:p>
+          <a:p/>
+          <a:p>
+            <a:r>
+              <a:t>### 簡易ナンバリング</a:t>
+            </a:r>
+          </a:p>
+          <a:p/>
+          <a:p>
+            <a:r>
+              <a:t>2つの pptx ファイルを結合してファイル単位で chapter としてナンバリングする機能のサンプルです。</a:t>
+            </a:r>
+          </a:p>
+          <a:p/>
+          <a:p>
+            <a:r>
+              <a:t>サンプルフォルダ：　pm2_simple_numbering</a:t>
+            </a:r>
+          </a:p>
+          <a:p/>
+          <a:p>
+            <a:r>
+              <a:t>[![サンプル：簡易ナンバリング](../../pm2_simple_numbering/build/figures/simple_numbering_guide_keyvisual.png/){ width=70% }](../../pm2_simple_numbering/README.md)</a:t>
+            </a:r>
+          </a:p>
+          <a:p>
+            <a:br/>
+          </a:p>
+          <a:p/>
+          <a:p>
+            <a:r>
+              <a:t>{{vfill}}</a:t>
+            </a:r>
+          </a:p>
+          <a:p/>
+          <a:p>
+            <a:r>
+              <a:t>{{pagebreak}}</a:t>
+            </a:r>
+          </a:p>
+          <a:p/>
+          <a:p>
+            <a:r>
+              <a:t>### chapter_marker によるナンバリング</a:t>
+            </a:r>
+          </a:p>
+          <a:p/>
+          <a:p>
+            <a:r>
+              <a:t>スライド上に埋め込んだ特殊文字列 #CHAPT#, #SECTION# で章・節番号のカウントを行う方法のサンプルです。</a:t>
+            </a:r>
+          </a:p>
+          <a:p/>
+          <a:p>
+            <a:r>
+              <a:t>サンプルフォルダ：　pm3_chapter_marker_numbering</a:t>
+            </a:r>
+          </a:p>
+          <a:p/>
+          <a:p>
+            <a:r>
+              <a:t>[![サンプル：chapter_marker によるナンバリング](../../pm3_chapter_marker_numbering/build/figures/chapter_marker_numbering_guide_keyvisual.png/){ width=90% }](../../pm3_chapter_marker_numbering/README.md)</a:t>
+            </a:r>
+          </a:p>
+          <a:p>
+            <a:br/>
+          </a:p>
+          <a:p/>
+          <a:p>
+            <a:r>
+              <a:t>{{vspace:5}}</a:t>
+            </a:r>
+          </a:p>
+          <a:p/>
+          <a:p>
+            <a:r>
+              <a:t>### スライド中の変数置換</a:t>
+            </a:r>
+          </a:p>
+          <a:p/>
+          <a:p>
+            <a:r>
               <a:t>スライド上に差し替え可能なプレースホルダーを用意しておき、設定ファイルの変数でそれを差し替え表示する方法のサンプルです。</a:t>
             </a:r>
           </a:p>
-          <a:p>
-            <a:endParaRPr lang="ja-JP" altLang="en-US"/>
-          </a:p>
-          <a:p>
-            <a:r>
-              <a:rPr lang="ja-JP" altLang="en-US"/>
-              <a:t>サンプルフォルダ：　</a:t>
-            </a:r>
-            <a:r>
-              <a:rPr lang="en-US" altLang="ja-JP"/>
-              <a:t>pm_variable_replacement</a:t>
-            </a:r>
-          </a:p>
-          <a:p>
-            <a:endParaRPr lang="en-US" altLang="ja-JP"/>
-          </a:p>
-          <a:p>
-            <a:r>
-              <a:rPr kumimoji="1" lang="en-US" altLang="ja-JP" sz="1200" b="0" kern="1200">
-                <a:solidFill>
-                  <a:schemeClr val="tx1"/>
-                </a:solidFill>
-                <a:effectLst/>
-                <a:latin typeface="BIZ UDPゴシック" panose="020B0400000000000000" pitchFamily="50" charset="-128"/>
-                <a:ea typeface="BIZ UDPゴシック" panose="020B0400000000000000" pitchFamily="50" charset="-128"/>
-                <a:cs typeface="+mn-cs"/>
-              </a:rPr>
-              <a:t>[![</a:t>
-            </a:r>
-            <a:r>
-              <a:rPr kumimoji="1" lang="ja-JP" altLang="en-US" sz="1200" b="0" kern="1200">
-                <a:solidFill>
-                  <a:schemeClr val="tx1"/>
-                </a:solidFill>
-                <a:effectLst/>
-                <a:latin typeface="BIZ UDPゴシック" panose="020B0400000000000000" pitchFamily="50" charset="-128"/>
-                <a:ea typeface="BIZ UDPゴシック" panose="020B0400000000000000" pitchFamily="50" charset="-128"/>
-                <a:cs typeface="+mn-cs"/>
-              </a:rPr>
-              <a:t>サンプル：</a:t>
-            </a:r>
-            <a:r>
-              <a:rPr lang="ja-JP" altLang="en-US"/>
-              <a:t>スライド中の変数置換</a:t>
-            </a:r>
-            <a:r>
-              <a:rPr kumimoji="1" lang="en-US" altLang="ja-JP" sz="1200" b="0" kern="1200">
-                <a:solidFill>
-                  <a:schemeClr val="tx1"/>
-                </a:solidFill>
-                <a:effectLst/>
-                <a:latin typeface="BIZ UDPゴシック" panose="020B0400000000000000" pitchFamily="50" charset="-128"/>
-                <a:ea typeface="BIZ UDPゴシック" panose="020B0400000000000000" pitchFamily="50" charset="-128"/>
-                <a:cs typeface="+mn-cs"/>
-              </a:rPr>
-              <a:t>](../../</a:t>
-            </a:r>
-            <a:r>
-              <a:rPr lang="en-US" altLang="ja-JP"/>
-              <a:t>pm4_variable_replacement</a:t>
-            </a:r>
-            <a:r>
-              <a:rPr kumimoji="1" lang="en-US" altLang="ja-JP" sz="1200" b="0" kern="1200">
-                <a:solidFill>
-                  <a:schemeClr val="tx1"/>
-                </a:solidFill>
-                <a:effectLst/>
-                <a:latin typeface="BIZ UDPゴシック" panose="020B0400000000000000" pitchFamily="50" charset="-128"/>
-                <a:ea typeface="BIZ UDPゴシック" panose="020B0400000000000000" pitchFamily="50" charset="-128"/>
-                <a:cs typeface="+mn-cs"/>
-              </a:rPr>
-              <a:t>/build/figures/</a:t>
-            </a:r>
-            <a:r>
-              <a:rPr lang="en-US" altLang="ja-JP"/>
-              <a:t>variable_replacement_</a:t>
-            </a:r>
-            <a:r>
-              <a:rPr kumimoji="1" lang="en-US" altLang="ja-JP" sz="1200" b="0" kern="1200">
-                <a:solidFill>
-                  <a:schemeClr val="tx1"/>
-                </a:solidFill>
-                <a:effectLst/>
-                <a:latin typeface="BIZ UDPゴシック" panose="020B0400000000000000" pitchFamily="50" charset="-128"/>
-                <a:ea typeface="BIZ UDPゴシック" panose="020B0400000000000000" pitchFamily="50" charset="-128"/>
-                <a:cs typeface="+mn-cs"/>
-              </a:rPr>
-              <a:t>guide_keyvisual.png/)</a:t>
-            </a:r>
-            <a:r>
-              <a:rPr lang="en-US" altLang="ja-JP"/>
-              <a:t>{ width=90% }</a:t>
-            </a:r>
-            <a:r>
-              <a:rPr kumimoji="1" lang="en-US" altLang="ja-JP" sz="1200" b="0" kern="1200">
-                <a:solidFill>
-                  <a:schemeClr val="tx1"/>
-                </a:solidFill>
-                <a:effectLst/>
-                <a:latin typeface="BIZ UDPゴシック" panose="020B0400000000000000" pitchFamily="50" charset="-128"/>
-                <a:ea typeface="BIZ UDPゴシック" panose="020B0400000000000000" pitchFamily="50" charset="-128"/>
-                <a:cs typeface="+mn-cs"/>
-              </a:rPr>
-              <a:t>](../../</a:t>
-            </a:r>
-            <a:r>
-              <a:rPr lang="en-US" altLang="ja-JP"/>
-              <a:t>pm4_variable_replacement</a:t>
-            </a:r>
-            <a:r>
-              <a:rPr kumimoji="1" lang="en-US" altLang="ja-JP" sz="1200" b="0" kern="1200">
-                <a:solidFill>
-                  <a:schemeClr val="tx1"/>
-                </a:solidFill>
-                <a:effectLst/>
-                <a:latin typeface="BIZ UDPゴシック" panose="020B0400000000000000" pitchFamily="50" charset="-128"/>
-                <a:ea typeface="BIZ UDPゴシック" panose="020B0400000000000000" pitchFamily="50" charset="-128"/>
-                <a:cs typeface="+mn-cs"/>
-              </a:rPr>
-              <a:t>/README.md)</a:t>
-            </a:r>
-          </a:p>
-          <a:p>
-            <a:pPr marL="0" marR="0" lvl="0" indent="0" algn="l" defTabSz="914400" rtl="0" eaLnBrk="1" fontAlgn="auto" latinLnBrk="0" hangingPunct="1">
-              <a:lnSpc>
-                <a:spcPct val="100000"/>
-              </a:lnSpc>
-              <a:spcBef>
-                <a:spcPts val="0"/>
-              </a:spcBef>
-              <a:spcAft>
-                <a:spcPts val="0"/>
-              </a:spcAft>
-              <a:buClrTx/>
-              <a:buSzTx/>
-              <a:buFontTx/>
-              <a:buNone/>
-              <a:tabLst/>
-              <a:defRPr/>
-            </a:pPr>
-            <a:br>
-              <a:rPr kumimoji="1" lang="en-US" altLang="ja-JP" sz="1200" b="0" kern="1200">
-                <a:solidFill>
-                  <a:schemeClr val="tx1"/>
-                </a:solidFill>
-                <a:effectLst/>
-                <a:latin typeface="BIZ UDPゴシック" panose="020B0400000000000000" pitchFamily="50" charset="-128"/>
-                <a:ea typeface="BIZ UDPゴシック" panose="020B0400000000000000" pitchFamily="50" charset="-128"/>
-                <a:cs typeface="+mn-cs"/>
-              </a:rPr>
-            </a:br>
-            <a:br>
-              <a:rPr kumimoji="1" lang="en-US" altLang="ja-JP" sz="1200" b="0" kern="1200">
-                <a:solidFill>
-                  <a:schemeClr val="tx1"/>
-                </a:solidFill>
-                <a:effectLst/>
-                <a:latin typeface="BIZ UDPゴシック" panose="020B0400000000000000" pitchFamily="50" charset="-128"/>
-                <a:ea typeface="BIZ UDPゴシック" panose="020B0400000000000000" pitchFamily="50" charset="-128"/>
-                <a:cs typeface="+mn-cs"/>
-              </a:rPr>
-            </a:br>
-            <a:r>
-              <a:rPr lang="en-US" altLang="ja-JP"/>
-              <a:t>```{=latex}</a:t>
-            </a:r>
-          </a:p>
-          <a:p>
-            <a:r>
-              <a:rPr lang="en-US" altLang="ja-JP"/>
-              <a:t>\vfill</a:t>
-            </a:r>
-          </a:p>
-          <a:p>
-            <a:r>
-              <a:rPr lang="en-US" altLang="ja-JP"/>
-              <a:t>\newpage</a:t>
-            </a:r>
-          </a:p>
-          <a:p>
-            <a:pPr marL="0" marR="0" lvl="0" indent="0" algn="l" defTabSz="914400" rtl="0" eaLnBrk="1" fontAlgn="auto" latinLnBrk="0" hangingPunct="1">
-              <a:lnSpc>
-                <a:spcPct val="100000"/>
-              </a:lnSpc>
-              <a:spcBef>
-                <a:spcPts val="0"/>
-              </a:spcBef>
-              <a:spcAft>
-                <a:spcPts val="0"/>
-              </a:spcAft>
-              <a:buClrTx/>
-              <a:buSzTx/>
-              <a:buFontTx/>
-              <a:buNone/>
-              <a:tabLst/>
-              <a:defRPr/>
-            </a:pPr>
-            <a:r>
-              <a:rPr lang="en-US" altLang="ja-JP"/>
-              <a:t>```</a:t>
-            </a:r>
-          </a:p>
-          <a:p>
-            <a:endParaRPr lang="en-US" altLang="ja-JP"/>
-          </a:p>
-          <a:p>
-            <a:r>
-              <a:rPr lang="en-US" altLang="ja-JP"/>
-              <a:t>### Chapter Cover </a:t>
-            </a:r>
-            <a:r>
-              <a:rPr lang="ja-JP" altLang="en-US"/>
-              <a:t>挿入運用</a:t>
-            </a:r>
-            <a:endParaRPr lang="en-US" altLang="ja-JP"/>
-          </a:p>
-          <a:p>
-            <a:endParaRPr lang="ja-JP" altLang="en-US"/>
-          </a:p>
-          <a:p>
-            <a:r>
-              <a:rPr lang="ja-JP" altLang="en-US"/>
-              <a:t>本題のコンテンツの前に章とびら（</a:t>
-            </a:r>
-            <a:r>
-              <a:rPr lang="en-US" altLang="ja-JP"/>
-              <a:t>Chapter Cover</a:t>
-            </a:r>
-            <a:r>
-              <a:rPr lang="ja-JP" altLang="en-US"/>
-              <a:t>）を挿入する運用方法です。</a:t>
-            </a:r>
-            <a:endParaRPr lang="en-US" altLang="ja-JP"/>
-          </a:p>
-          <a:p>
-            <a:endParaRPr lang="ja-JP" altLang="en-US"/>
-          </a:p>
-          <a:p>
-            <a:r>
-              <a:rPr lang="ja-JP" altLang="en-US"/>
-              <a:t>サンプルフォルダ：　</a:t>
-            </a:r>
-            <a:r>
-              <a:rPr lang="en-US" altLang="ja-JP"/>
-              <a:t>pm5_chapter_cover_insertion</a:t>
-            </a:r>
-          </a:p>
-          <a:p>
-            <a:endParaRPr lang="en-US" altLang="ja-JP"/>
-          </a:p>
-          <a:p>
-            <a:r>
-              <a:rPr kumimoji="1" lang="en-US" altLang="ja-JP" sz="1200" b="0" kern="1200">
-                <a:solidFill>
-                  <a:schemeClr val="tx1"/>
-                </a:solidFill>
-                <a:effectLst/>
-                <a:latin typeface="BIZ UDPゴシック" panose="020B0400000000000000" pitchFamily="50" charset="-128"/>
-                <a:ea typeface="BIZ UDPゴシック" panose="020B0400000000000000" pitchFamily="50" charset="-128"/>
-                <a:cs typeface="+mn-cs"/>
-              </a:rPr>
-              <a:t>[![</a:t>
-            </a:r>
-            <a:r>
-              <a:rPr kumimoji="1" lang="ja-JP" altLang="en-US" sz="1200" b="0" kern="1200">
-                <a:solidFill>
-                  <a:schemeClr val="tx1"/>
-                </a:solidFill>
-                <a:effectLst/>
-                <a:latin typeface="BIZ UDPゴシック" panose="020B0400000000000000" pitchFamily="50" charset="-128"/>
-                <a:ea typeface="BIZ UDPゴシック" panose="020B0400000000000000" pitchFamily="50" charset="-128"/>
-                <a:cs typeface="+mn-cs"/>
-              </a:rPr>
-              <a:t>サンプル：</a:t>
-            </a:r>
-            <a:r>
-              <a:rPr lang="en-US" altLang="ja-JP"/>
-              <a:t>Chapter Cover </a:t>
-            </a:r>
-            <a:r>
-              <a:rPr lang="ja-JP" altLang="en-US"/>
-              <a:t>挿入運用</a:t>
-            </a:r>
-            <a:r>
-              <a:rPr kumimoji="1" lang="en-US" altLang="ja-JP" sz="1200" b="0" kern="1200">
-                <a:solidFill>
-                  <a:schemeClr val="tx1"/>
-                </a:solidFill>
-                <a:effectLst/>
-                <a:latin typeface="BIZ UDPゴシック" panose="020B0400000000000000" pitchFamily="50" charset="-128"/>
-                <a:ea typeface="BIZ UDPゴシック" panose="020B0400000000000000" pitchFamily="50" charset="-128"/>
-                <a:cs typeface="+mn-cs"/>
-              </a:rPr>
-              <a:t>](../../</a:t>
-            </a:r>
-            <a:r>
-              <a:rPr lang="en-US" altLang="ja-JP"/>
-              <a:t>pm5_chapter_cover_insertion</a:t>
-            </a:r>
-            <a:r>
-              <a:rPr kumimoji="1" lang="en-US" altLang="ja-JP" sz="1200" b="0" kern="1200">
-                <a:solidFill>
-                  <a:schemeClr val="tx1"/>
-                </a:solidFill>
-                <a:effectLst/>
-                <a:latin typeface="BIZ UDPゴシック" panose="020B0400000000000000" pitchFamily="50" charset="-128"/>
-                <a:ea typeface="BIZ UDPゴシック" panose="020B0400000000000000" pitchFamily="50" charset="-128"/>
-                <a:cs typeface="+mn-cs"/>
-              </a:rPr>
-              <a:t>/build/figures/</a:t>
-            </a:r>
-            <a:r>
-              <a:rPr lang="en-US" altLang="ja-JP"/>
-              <a:t>chapter_cover_insertion_</a:t>
-            </a:r>
-            <a:r>
-              <a:rPr kumimoji="1" lang="en-US" altLang="ja-JP" sz="1200" b="0" kern="1200">
-                <a:solidFill>
-                  <a:schemeClr val="tx1"/>
-                </a:solidFill>
-                <a:effectLst/>
-                <a:latin typeface="BIZ UDPゴシック" panose="020B0400000000000000" pitchFamily="50" charset="-128"/>
-                <a:ea typeface="BIZ UDPゴシック" panose="020B0400000000000000" pitchFamily="50" charset="-128"/>
-                <a:cs typeface="+mn-cs"/>
-              </a:rPr>
-              <a:t>guide_keyvisual.png/)</a:t>
-            </a:r>
-            <a:r>
-              <a:rPr lang="en-US" altLang="ja-JP"/>
-              <a:t>{ width=80% }</a:t>
-            </a:r>
-            <a:r>
-              <a:rPr kumimoji="1" lang="en-US" altLang="ja-JP" sz="1200" b="0" kern="1200">
-                <a:solidFill>
-                  <a:schemeClr val="tx1"/>
-                </a:solidFill>
-                <a:effectLst/>
-                <a:latin typeface="BIZ UDPゴシック" panose="020B0400000000000000" pitchFamily="50" charset="-128"/>
-                <a:ea typeface="BIZ UDPゴシック" panose="020B0400000000000000" pitchFamily="50" charset="-128"/>
-                <a:cs typeface="+mn-cs"/>
-              </a:rPr>
-              <a:t>](../../</a:t>
-            </a:r>
-            <a:r>
-              <a:rPr lang="en-US" altLang="ja-JP"/>
-              <a:t>pm5_chapter_cover_insertion</a:t>
-            </a:r>
-            <a:r>
-              <a:rPr kumimoji="1" lang="en-US" altLang="ja-JP" sz="1200" b="0" kern="1200">
-                <a:solidFill>
-                  <a:schemeClr val="tx1"/>
-                </a:solidFill>
-                <a:effectLst/>
-                <a:latin typeface="BIZ UDPゴシック" panose="020B0400000000000000" pitchFamily="50" charset="-128"/>
-                <a:ea typeface="BIZ UDPゴシック" panose="020B0400000000000000" pitchFamily="50" charset="-128"/>
-                <a:cs typeface="+mn-cs"/>
-              </a:rPr>
-              <a:t>/README.md)</a:t>
-            </a:r>
-          </a:p>
-          <a:p>
-            <a:pPr marL="0" marR="0" lvl="0" indent="0" algn="l" defTabSz="914400" rtl="0" eaLnBrk="1" fontAlgn="auto" latinLnBrk="0" hangingPunct="1">
-              <a:lnSpc>
-                <a:spcPct val="100000"/>
-              </a:lnSpc>
-              <a:spcBef>
-                <a:spcPts val="0"/>
-              </a:spcBef>
-              <a:spcAft>
-                <a:spcPts val="0"/>
-              </a:spcAft>
-              <a:buClrTx/>
-              <a:buSzTx/>
-              <a:buFontTx/>
-              <a:buNone/>
-              <a:tabLst/>
-              <a:defRPr/>
-            </a:pPr>
-            <a:br>
-              <a:rPr kumimoji="1" lang="en-US" altLang="ja-JP" sz="1200" b="0" kern="1200">
-                <a:solidFill>
-                  <a:schemeClr val="tx1"/>
-                </a:solidFill>
-                <a:effectLst/>
-                <a:latin typeface="BIZ UDPゴシック" panose="020B0400000000000000" pitchFamily="50" charset="-128"/>
-                <a:ea typeface="BIZ UDPゴシック" panose="020B0400000000000000" pitchFamily="50" charset="-128"/>
-                <a:cs typeface="+mn-cs"/>
-              </a:rPr>
-            </a:br>
-            <a:br>
-              <a:rPr kumimoji="1" lang="en-US" altLang="ja-JP" sz="1200" b="0" kern="1200">
-                <a:solidFill>
-                  <a:schemeClr val="tx1"/>
-                </a:solidFill>
-                <a:effectLst/>
-                <a:latin typeface="BIZ UDPゴシック" panose="020B0400000000000000" pitchFamily="50" charset="-128"/>
-                <a:ea typeface="BIZ UDPゴシック" panose="020B0400000000000000" pitchFamily="50" charset="-128"/>
-                <a:cs typeface="+mn-cs"/>
-              </a:rPr>
-            </a:br>
-            <a:r>
-              <a:rPr lang="en-US" altLang="ja-JP"/>
-              <a:t>```{=latex}</a:t>
-            </a:r>
-          </a:p>
-          <a:p>
-            <a:r>
-              <a:rPr lang="en-US" altLang="ja-JP"/>
-              <a:t>\par\vspace{5\baselineskip}</a:t>
-            </a:r>
-          </a:p>
-          <a:p>
-            <a:pPr marL="0" marR="0" lvl="0" indent="0" algn="l" defTabSz="914400" rtl="0" eaLnBrk="1" fontAlgn="auto" latinLnBrk="0" hangingPunct="1">
-              <a:lnSpc>
-                <a:spcPct val="100000"/>
-              </a:lnSpc>
-              <a:spcBef>
-                <a:spcPts val="0"/>
-              </a:spcBef>
-              <a:spcAft>
-                <a:spcPts val="0"/>
-              </a:spcAft>
-              <a:buClrTx/>
-              <a:buSzTx/>
-              <a:buFontTx/>
-              <a:buNone/>
-              <a:tabLst/>
-              <a:defRPr/>
-            </a:pPr>
-            <a:r>
-              <a:rPr lang="en-US" altLang="ja-JP"/>
-              <a:t>```</a:t>
-            </a:r>
-          </a:p>
-          <a:p>
-            <a:endParaRPr lang="en-US" altLang="ja-JP"/>
-          </a:p>
-          <a:p>
-            <a:r>
-              <a:rPr lang="en-US" altLang="ja-JP"/>
-              <a:t>### stylebase</a:t>
-            </a:r>
-            <a:r>
-              <a:rPr lang="ja-JP" altLang="en-US"/>
-              <a:t>を別に指定する機能</a:t>
-            </a:r>
-            <a:endParaRPr lang="en-US" altLang="ja-JP"/>
-          </a:p>
-          <a:p>
-            <a:endParaRPr lang="ja-JP" altLang="en-US"/>
-          </a:p>
-          <a:p>
-            <a:r>
-              <a:rPr lang="en-US" altLang="ja-JP"/>
-              <a:t>pptx</a:t>
-            </a:r>
-            <a:r>
-              <a:rPr lang="ja-JP" altLang="en-US"/>
-              <a:t>ファイルを結合する際、コンテンツとは別にスタイル情報のみ使用するファイルを別途指定する機能です。</a:t>
-            </a:r>
-            <a:endParaRPr lang="en-US" altLang="ja-JP"/>
-          </a:p>
-          <a:p>
-            <a:endParaRPr lang="ja-JP" altLang="en-US"/>
-          </a:p>
-          <a:p>
-            <a:r>
-              <a:rPr lang="ja-JP" altLang="en-US"/>
-              <a:t>サンプルフォルダ：　</a:t>
-            </a:r>
-            <a:r>
-              <a:rPr lang="en-US" altLang="ja-JP"/>
-              <a:t>pm6_stylebase</a:t>
-            </a:r>
-          </a:p>
-          <a:p>
-            <a:endParaRPr lang="en-US" altLang="ja-JP"/>
-          </a:p>
-          <a:p>
-            <a:r>
-              <a:rPr kumimoji="1" lang="en-US" altLang="ja-JP" sz="1200" b="0" kern="1200">
-                <a:solidFill>
-                  <a:schemeClr val="tx1"/>
-                </a:solidFill>
-                <a:effectLst/>
-                <a:latin typeface="BIZ UDPゴシック" panose="020B0400000000000000" pitchFamily="50" charset="-128"/>
-                <a:ea typeface="BIZ UDPゴシック" panose="020B0400000000000000" pitchFamily="50" charset="-128"/>
-                <a:cs typeface="+mn-cs"/>
-              </a:rPr>
-              <a:t>[![</a:t>
-            </a:r>
-            <a:r>
-              <a:rPr kumimoji="1" lang="ja-JP" altLang="en-US" sz="1200" b="0" kern="1200">
-                <a:solidFill>
-                  <a:schemeClr val="tx1"/>
-                </a:solidFill>
-                <a:effectLst/>
-                <a:latin typeface="BIZ UDPゴシック" panose="020B0400000000000000" pitchFamily="50" charset="-128"/>
-                <a:ea typeface="BIZ UDPゴシック" panose="020B0400000000000000" pitchFamily="50" charset="-128"/>
-                <a:cs typeface="+mn-cs"/>
-              </a:rPr>
-              <a:t>サンプル：</a:t>
-            </a:r>
-            <a:r>
-              <a:rPr lang="en-US" altLang="ja-JP"/>
-              <a:t>stylebase</a:t>
-            </a:r>
-            <a:r>
-              <a:rPr lang="ja-JP" altLang="en-US"/>
-              <a:t>を別に指定する機能</a:t>
-            </a:r>
-            <a:r>
-              <a:rPr kumimoji="1" lang="en-US" altLang="ja-JP" sz="1200" b="0" kern="1200">
-                <a:solidFill>
-                  <a:schemeClr val="tx1"/>
-                </a:solidFill>
-                <a:effectLst/>
-                <a:latin typeface="BIZ UDPゴシック" panose="020B0400000000000000" pitchFamily="50" charset="-128"/>
-                <a:ea typeface="BIZ UDPゴシック" panose="020B0400000000000000" pitchFamily="50" charset="-128"/>
-                <a:cs typeface="+mn-cs"/>
-              </a:rPr>
-              <a:t>](../../</a:t>
-            </a:r>
-            <a:r>
-              <a:rPr lang="en-US" altLang="ja-JP"/>
-              <a:t>pm6_stylebase</a:t>
-            </a:r>
-            <a:r>
-              <a:rPr kumimoji="1" lang="en-US" altLang="ja-JP" sz="1200" b="0" kern="1200">
-                <a:solidFill>
-                  <a:schemeClr val="tx1"/>
-                </a:solidFill>
-                <a:effectLst/>
-                <a:latin typeface="BIZ UDPゴシック" panose="020B0400000000000000" pitchFamily="50" charset="-128"/>
-                <a:ea typeface="BIZ UDPゴシック" panose="020B0400000000000000" pitchFamily="50" charset="-128"/>
-                <a:cs typeface="+mn-cs"/>
-              </a:rPr>
-              <a:t>/build/figures/</a:t>
-            </a:r>
-            <a:r>
-              <a:rPr lang="en-US" altLang="ja-JP"/>
-              <a:t>stylebase_</a:t>
-            </a:r>
-            <a:r>
-              <a:rPr kumimoji="1" lang="en-US" altLang="ja-JP" sz="1200" b="0" kern="1200">
-                <a:solidFill>
-                  <a:schemeClr val="tx1"/>
-                </a:solidFill>
-                <a:effectLst/>
-                <a:latin typeface="BIZ UDPゴシック" panose="020B0400000000000000" pitchFamily="50" charset="-128"/>
-                <a:ea typeface="BIZ UDPゴシック" panose="020B0400000000000000" pitchFamily="50" charset="-128"/>
-                <a:cs typeface="+mn-cs"/>
-              </a:rPr>
-              <a:t>guide_keyvisual.png/)</a:t>
-            </a:r>
-            <a:r>
-              <a:rPr lang="en-US" altLang="ja-JP"/>
-              <a:t>{ width=90% }</a:t>
-            </a:r>
-            <a:r>
-              <a:rPr kumimoji="1" lang="en-US" altLang="ja-JP" sz="1200" b="0" kern="1200">
-                <a:solidFill>
-                  <a:schemeClr val="tx1"/>
-                </a:solidFill>
-                <a:effectLst/>
-                <a:latin typeface="BIZ UDPゴシック" panose="020B0400000000000000" pitchFamily="50" charset="-128"/>
-                <a:ea typeface="BIZ UDPゴシック" panose="020B0400000000000000" pitchFamily="50" charset="-128"/>
-                <a:cs typeface="+mn-cs"/>
-              </a:rPr>
-              <a:t>](../../</a:t>
-            </a:r>
-            <a:r>
-              <a:rPr lang="en-US" altLang="ja-JP"/>
-              <a:t>pm6_stylebase</a:t>
-            </a:r>
-            <a:r>
-              <a:rPr kumimoji="1" lang="en-US" altLang="ja-JP" sz="1200" b="0" kern="1200">
-                <a:solidFill>
-                  <a:schemeClr val="tx1"/>
-                </a:solidFill>
-                <a:effectLst/>
-                <a:latin typeface="BIZ UDPゴシック" panose="020B0400000000000000" pitchFamily="50" charset="-128"/>
-                <a:ea typeface="BIZ UDPゴシック" panose="020B0400000000000000" pitchFamily="50" charset="-128"/>
-                <a:cs typeface="+mn-cs"/>
-              </a:rPr>
-              <a:t>/README.md)</a:t>
-            </a:r>
-          </a:p>
-          <a:p>
-            <a:pPr marL="0" marR="0" lvl="0" indent="0" algn="l" defTabSz="914400" rtl="0" eaLnBrk="1" fontAlgn="auto" latinLnBrk="0" hangingPunct="1">
-              <a:lnSpc>
-                <a:spcPct val="100000"/>
-              </a:lnSpc>
-              <a:spcBef>
-                <a:spcPts val="0"/>
-              </a:spcBef>
-              <a:spcAft>
-                <a:spcPts val="0"/>
-              </a:spcAft>
-              <a:buClrTx/>
-              <a:buSzTx/>
-              <a:buFontTx/>
-              <a:buNone/>
-              <a:tabLst/>
-              <a:defRPr/>
-            </a:pPr>
-            <a:br>
-              <a:rPr kumimoji="1" lang="en-US" altLang="ja-JP" sz="1200" b="0" kern="1200">
-                <a:solidFill>
-                  <a:schemeClr val="tx1"/>
-                </a:solidFill>
-                <a:effectLst/>
-                <a:latin typeface="BIZ UDPゴシック" panose="020B0400000000000000" pitchFamily="50" charset="-128"/>
-                <a:ea typeface="BIZ UDPゴシック" panose="020B0400000000000000" pitchFamily="50" charset="-128"/>
-                <a:cs typeface="+mn-cs"/>
-              </a:rPr>
-            </a:br>
-            <a:br>
-              <a:rPr kumimoji="1" lang="en-US" altLang="ja-JP" sz="1200" b="0" kern="1200">
-                <a:solidFill>
-                  <a:schemeClr val="tx1"/>
-                </a:solidFill>
-                <a:effectLst/>
-                <a:latin typeface="BIZ UDPゴシック" panose="020B0400000000000000" pitchFamily="50" charset="-128"/>
-                <a:ea typeface="BIZ UDPゴシック" panose="020B0400000000000000" pitchFamily="50" charset="-128"/>
-                <a:cs typeface="+mn-cs"/>
-              </a:rPr>
-            </a:br>
-            <a:r>
-              <a:rPr lang="en-US" altLang="ja-JP"/>
-              <a:t>```{=latex}</a:t>
-            </a:r>
-          </a:p>
-          <a:p>
-            <a:r>
-              <a:rPr lang="en-US" altLang="ja-JP"/>
-              <a:t>\vfill</a:t>
-            </a:r>
-          </a:p>
-          <a:p>
-            <a:r>
-              <a:rPr lang="en-US" altLang="ja-JP"/>
-              <a:t>\newpage</a:t>
-            </a:r>
-          </a:p>
-          <a:p>
-            <a:pPr marL="0" marR="0" lvl="0" indent="0" algn="l" defTabSz="914400" rtl="0" eaLnBrk="1" fontAlgn="auto" latinLnBrk="0" hangingPunct="1">
-              <a:lnSpc>
-                <a:spcPct val="100000"/>
-              </a:lnSpc>
-              <a:spcBef>
-                <a:spcPts val="0"/>
-              </a:spcBef>
-              <a:spcAft>
-                <a:spcPts val="0"/>
-              </a:spcAft>
-              <a:buClrTx/>
-              <a:buSzTx/>
-              <a:buFontTx/>
-              <a:buNone/>
-              <a:tabLst/>
-              <a:defRPr/>
-            </a:pPr>
-            <a:r>
-              <a:rPr lang="en-US" altLang="ja-JP"/>
-              <a:t>```</a:t>
-            </a:r>
-          </a:p>
-          <a:p>
-            <a:pPr marL="0" marR="0" lvl="0" indent="0" algn="l" defTabSz="914400" rtl="0" eaLnBrk="1" fontAlgn="auto" latinLnBrk="0" hangingPunct="1">
-              <a:lnSpc>
-                <a:spcPct val="100000"/>
-              </a:lnSpc>
-              <a:spcBef>
-                <a:spcPts val="0"/>
-              </a:spcBef>
-              <a:spcAft>
-                <a:spcPts val="0"/>
-              </a:spcAft>
-              <a:buClrTx/>
-              <a:buSzTx/>
-              <a:buFontTx/>
-              <a:buNone/>
-              <a:tabLst/>
-              <a:defRPr/>
-            </a:pPr>
-            <a:endParaRPr lang="en-US" altLang="ja-JP"/>
-          </a:p>
-          <a:p>
-            <a:r>
-              <a:rPr lang="en-US" altLang="ja-JP"/>
-              <a:t>### </a:t>
-            </a:r>
-            <a:r>
-              <a:rPr kumimoji="1" lang="ja-JP" altLang="en-US"/>
-              <a:t>ファイルの分割挿入機能</a:t>
-            </a:r>
-            <a:endParaRPr kumimoji="1" lang="en-US" altLang="ja-JP"/>
-          </a:p>
-          <a:p>
-            <a:endParaRPr lang="ja-JP" altLang="en-US"/>
-          </a:p>
-          <a:p>
-            <a:r>
-              <a:rPr lang="ja-JP" altLang="en-US"/>
+          <a:p/>
+          <a:p>
+            <a:r>
+              <a:t>サンプルフォルダ：　pm_variable_replacement</a:t>
+            </a:r>
+          </a:p>
+          <a:p/>
+          <a:p>
+            <a:r>
+              <a:t>[![サンプル：スライド中の変数置換](../../pm4_variable_replacement/build/figures/variable_replacement_guide_keyvisual.png/){ width=90% }](../../pm4_variable_replacement/README.md)</a:t>
+            </a:r>
+          </a:p>
+          <a:p>
+            <a:br/>
+          </a:p>
+          <a:p/>
+          <a:p>
+            <a:r>
+              <a:t>{{vfill}}</a:t>
+            </a:r>
+          </a:p>
+          <a:p/>
+          <a:p>
+            <a:r>
+              <a:t>{{pagebreak}}</a:t>
+            </a:r>
+          </a:p>
+          <a:p/>
+          <a:p>
+            <a:r>
+              <a:t>### Chapter Cover 挿入運用</a:t>
+            </a:r>
+          </a:p>
+          <a:p/>
+          <a:p>
+            <a:r>
+              <a:t>本題のコンテンツの前に章とびら（Chapter Cover）を挿入する運用方法です。</a:t>
+            </a:r>
+          </a:p>
+          <a:p/>
+          <a:p>
+            <a:r>
+              <a:t>サンプルフォルダ：　pm5_chapter_cover_insertion</a:t>
+            </a:r>
+          </a:p>
+          <a:p/>
+          <a:p>
+            <a:r>
+              <a:t>[![サンプル：Chapter Cover 挿入運用](../../pm5_chapter_cover_insertion/build/figures/chapter_cover_insertion_guide_keyvisual.png/){ width=80% }](../../pm5_chapter_cover_insertion/README.md)</a:t>
+            </a:r>
+          </a:p>
+          <a:p>
+            <a:br/>
+          </a:p>
+          <a:p/>
+          <a:p>
+            <a:r>
+              <a:t>{{vspace:5}}</a:t>
+            </a:r>
+          </a:p>
+          <a:p/>
+          <a:p>
+            <a:r>
+              <a:t>### stylebaseを別に指定する機能</a:t>
+            </a:r>
+          </a:p>
+          <a:p/>
+          <a:p>
+            <a:r>
+              <a:t>pptxファイルを結合する際、コンテンツとは別にスタイル情報のみ使用するファイルを別途指定する機能です。</a:t>
+            </a:r>
+          </a:p>
+          <a:p/>
+          <a:p>
+            <a:r>
+              <a:t>サンプルフォルダ：　pm6_stylebase</a:t>
+            </a:r>
+          </a:p>
+          <a:p/>
+          <a:p>
+            <a:r>
+              <a:t>[![サンプル：stylebaseを別に指定する機能](../../pm6_stylebase/build/figures/stylebase_guide_keyvisual.png/){ width=90% }](../../pm6_stylebase/README.md)</a:t>
+            </a:r>
+          </a:p>
+          <a:p>
+            <a:br/>
+          </a:p>
+          <a:p/>
+          <a:p>
+            <a:r>
+              <a:t>{{vfill}}</a:t>
+            </a:r>
+          </a:p>
+          <a:p/>
+          <a:p>
+            <a:r>
+              <a:t>{{pagebreak}}</a:t>
+            </a:r>
+          </a:p>
+          <a:p/>
+          <a:p>
+            <a:r>
+              <a:t>### ファイルの分割挿入機能</a:t>
+            </a:r>
+          </a:p>
+          <a:p/>
+          <a:p>
+            <a:r>
               <a:t>ファイル全体ではなく一部を選択して結合する機能です。</a:t>
             </a:r>
-            <a:endParaRPr lang="en-US" altLang="ja-JP"/>
-          </a:p>
-          <a:p>
-            <a:endParaRPr lang="ja-JP" altLang="en-US"/>
-          </a:p>
-          <a:p>
-            <a:r>
-              <a:rPr lang="ja-JP" altLang="en-US"/>
-              <a:t>サンプルフォルダ：　</a:t>
-            </a:r>
-            <a:r>
-              <a:rPr lang="en-US" altLang="ja-JP"/>
-              <a:t>pm7_splitted_insertion</a:t>
-            </a:r>
-          </a:p>
-          <a:p>
-            <a:endParaRPr lang="en-US" altLang="ja-JP"/>
-          </a:p>
-          <a:p>
-            <a:r>
-              <a:rPr kumimoji="1" lang="en-US" altLang="ja-JP" sz="1200" b="0" kern="1200">
-                <a:solidFill>
-                  <a:schemeClr val="tx1"/>
-                </a:solidFill>
-                <a:effectLst/>
-                <a:latin typeface="BIZ UDPゴシック" panose="020B0400000000000000" pitchFamily="50" charset="-128"/>
-                <a:ea typeface="BIZ UDPゴシック" panose="020B0400000000000000" pitchFamily="50" charset="-128"/>
-                <a:cs typeface="+mn-cs"/>
-              </a:rPr>
-              <a:t>[![</a:t>
-            </a:r>
-            <a:r>
-              <a:rPr kumimoji="1" lang="ja-JP" altLang="en-US" sz="1200" b="0" kern="1200">
-                <a:solidFill>
-                  <a:schemeClr val="tx1"/>
-                </a:solidFill>
-                <a:effectLst/>
-                <a:latin typeface="BIZ UDPゴシック" panose="020B0400000000000000" pitchFamily="50" charset="-128"/>
-                <a:ea typeface="BIZ UDPゴシック" panose="020B0400000000000000" pitchFamily="50" charset="-128"/>
-                <a:cs typeface="+mn-cs"/>
-              </a:rPr>
-              <a:t>サンプル：</a:t>
-            </a:r>
-            <a:r>
-              <a:rPr kumimoji="1" lang="ja-JP" altLang="en-US"/>
-              <a:t>ファイルの分割挿入機能</a:t>
-            </a:r>
-            <a:r>
-              <a:rPr kumimoji="1" lang="en-US" altLang="ja-JP" sz="1200" b="0" kern="1200">
-                <a:solidFill>
-                  <a:schemeClr val="tx1"/>
-                </a:solidFill>
-                <a:effectLst/>
-                <a:latin typeface="BIZ UDPゴシック" panose="020B0400000000000000" pitchFamily="50" charset="-128"/>
-                <a:ea typeface="BIZ UDPゴシック" panose="020B0400000000000000" pitchFamily="50" charset="-128"/>
-                <a:cs typeface="+mn-cs"/>
-              </a:rPr>
-              <a:t>](../../</a:t>
-            </a:r>
-            <a:r>
-              <a:rPr lang="en-US" altLang="ja-JP"/>
-              <a:t>pm7_splitted_insertion</a:t>
-            </a:r>
-            <a:r>
-              <a:rPr kumimoji="1" lang="en-US" altLang="ja-JP" sz="1200" b="0" kern="1200">
-                <a:solidFill>
-                  <a:schemeClr val="tx1"/>
-                </a:solidFill>
-                <a:effectLst/>
-                <a:latin typeface="BIZ UDPゴシック" panose="020B0400000000000000" pitchFamily="50" charset="-128"/>
-                <a:ea typeface="BIZ UDPゴシック" panose="020B0400000000000000" pitchFamily="50" charset="-128"/>
-                <a:cs typeface="+mn-cs"/>
-              </a:rPr>
-              <a:t>/build/figures/</a:t>
-            </a:r>
-            <a:r>
-              <a:rPr lang="en-US" altLang="ja-JP"/>
-              <a:t>splitted_insertion_</a:t>
-            </a:r>
-            <a:r>
-              <a:rPr kumimoji="1" lang="en-US" altLang="ja-JP" sz="1200" b="0" kern="1200">
-                <a:solidFill>
-                  <a:schemeClr val="tx1"/>
-                </a:solidFill>
-                <a:effectLst/>
-                <a:latin typeface="BIZ UDPゴシック" panose="020B0400000000000000" pitchFamily="50" charset="-128"/>
-                <a:ea typeface="BIZ UDPゴシック" panose="020B0400000000000000" pitchFamily="50" charset="-128"/>
-                <a:cs typeface="+mn-cs"/>
-              </a:rPr>
-              <a:t>guide_keyvisual.png/)</a:t>
-            </a:r>
-            <a:r>
-              <a:rPr lang="en-US" altLang="ja-JP"/>
-              <a:t>{ width=60% }</a:t>
-            </a:r>
-            <a:r>
-              <a:rPr kumimoji="1" lang="en-US" altLang="ja-JP" sz="1200" b="0" kern="1200">
-                <a:solidFill>
-                  <a:schemeClr val="tx1"/>
-                </a:solidFill>
-                <a:effectLst/>
-                <a:latin typeface="BIZ UDPゴシック" panose="020B0400000000000000" pitchFamily="50" charset="-128"/>
-                <a:ea typeface="BIZ UDPゴシック" panose="020B0400000000000000" pitchFamily="50" charset="-128"/>
-                <a:cs typeface="+mn-cs"/>
-              </a:rPr>
-              <a:t>](../../</a:t>
-            </a:r>
-            <a:r>
-              <a:rPr lang="en-US" altLang="ja-JP"/>
-              <a:t>pm7_splitted_insertion</a:t>
-            </a:r>
-            <a:r>
-              <a:rPr kumimoji="1" lang="en-US" altLang="ja-JP" sz="1200" b="0" kern="1200">
-                <a:solidFill>
-                  <a:schemeClr val="tx1"/>
-                </a:solidFill>
-                <a:effectLst/>
-                <a:latin typeface="BIZ UDPゴシック" panose="020B0400000000000000" pitchFamily="50" charset="-128"/>
-                <a:ea typeface="BIZ UDPゴシック" panose="020B0400000000000000" pitchFamily="50" charset="-128"/>
-                <a:cs typeface="+mn-cs"/>
-              </a:rPr>
-              <a:t>/README.md)</a:t>
-            </a:r>
-          </a:p>
-          <a:p>
-            <a:pPr marL="0" marR="0" lvl="0" indent="0" algn="l" defTabSz="914400" rtl="0" eaLnBrk="1" fontAlgn="auto" latinLnBrk="0" hangingPunct="1">
-              <a:lnSpc>
-                <a:spcPct val="100000"/>
-              </a:lnSpc>
-              <a:spcBef>
-                <a:spcPts val="0"/>
-              </a:spcBef>
-              <a:spcAft>
-                <a:spcPts val="0"/>
-              </a:spcAft>
-              <a:buClrTx/>
-              <a:buSzTx/>
-              <a:buFontTx/>
-              <a:buNone/>
-              <a:tabLst/>
-              <a:defRPr/>
-            </a:pPr>
-            <a:br>
-              <a:rPr kumimoji="1" lang="en-US" altLang="ja-JP" sz="1200" b="0" kern="1200">
-                <a:solidFill>
-                  <a:schemeClr val="tx1"/>
-                </a:solidFill>
-                <a:effectLst/>
-                <a:latin typeface="BIZ UDPゴシック" panose="020B0400000000000000" pitchFamily="50" charset="-128"/>
-                <a:ea typeface="BIZ UDPゴシック" panose="020B0400000000000000" pitchFamily="50" charset="-128"/>
-                <a:cs typeface="+mn-cs"/>
-              </a:rPr>
-            </a:br>
-            <a:br>
-              <a:rPr kumimoji="1" lang="en-US" altLang="ja-JP" sz="1200" b="0" kern="1200">
-                <a:solidFill>
-                  <a:schemeClr val="tx1"/>
-                </a:solidFill>
-                <a:effectLst/>
-                <a:latin typeface="BIZ UDPゴシック" panose="020B0400000000000000" pitchFamily="50" charset="-128"/>
-                <a:ea typeface="BIZ UDPゴシック" panose="020B0400000000000000" pitchFamily="50" charset="-128"/>
-                <a:cs typeface="+mn-cs"/>
-              </a:rPr>
-            </a:br>
-            <a:r>
-              <a:rPr lang="en-US" altLang="ja-JP"/>
-              <a:t>```{=latex}</a:t>
-            </a:r>
-          </a:p>
-          <a:p>
-            <a:r>
-              <a:rPr lang="en-US" altLang="ja-JP"/>
-              <a:t>\par\vspace{5\baselineskip}</a:t>
-            </a:r>
-          </a:p>
-          <a:p>
-            <a:pPr marL="0" marR="0" lvl="0" indent="0" algn="l" defTabSz="914400" rtl="0" eaLnBrk="1" fontAlgn="auto" latinLnBrk="0" hangingPunct="1">
-              <a:lnSpc>
-                <a:spcPct val="100000"/>
-              </a:lnSpc>
-              <a:spcBef>
-                <a:spcPts val="0"/>
-              </a:spcBef>
-              <a:spcAft>
-                <a:spcPts val="0"/>
-              </a:spcAft>
-              <a:buClrTx/>
-              <a:buSzTx/>
-              <a:buFontTx/>
-              <a:buNone/>
-              <a:tabLst/>
-              <a:defRPr/>
-            </a:pPr>
-            <a:r>
-              <a:rPr lang="en-US" altLang="ja-JP"/>
-              <a:t>```</a:t>
-            </a:r>
-          </a:p>
-          <a:p>
-            <a:endParaRPr lang="en-US" altLang="ja-JP"/>
-          </a:p>
-          <a:p>
-            <a:r>
-              <a:rPr lang="en-US" altLang="ja-JP"/>
-              <a:t>### </a:t>
-            </a:r>
-            <a:r>
-              <a:rPr lang="ja-JP" altLang="en-US"/>
-              <a:t>指定したシェイプを消去</a:t>
-            </a:r>
-            <a:endParaRPr lang="en-US" altLang="ja-JP"/>
-          </a:p>
-          <a:p>
-            <a:endParaRPr lang="ja-JP" altLang="en-US"/>
-          </a:p>
-          <a:p>
-            <a:r>
-              <a:rPr lang="ja-JP" altLang="en-US"/>
+          </a:p>
+          <a:p/>
+          <a:p>
+            <a:r>
+              <a:t>サンプルフォルダ：　pm7_splitted_insertion</a:t>
+            </a:r>
+          </a:p>
+          <a:p/>
+          <a:p>
+            <a:r>
+              <a:t>[![サンプル：ファイルの分割挿入機能](../../pm7_splitted_insertion/build/figures/splitted_insertion_guide_keyvisual.png/){ width=60% }](../../pm7_splitted_insertion/README.md)</a:t>
+            </a:r>
+          </a:p>
+          <a:p>
+            <a:br/>
+          </a:p>
+          <a:p/>
+          <a:p>
+            <a:r>
+              <a:t>{{vspace:5}}</a:t>
+            </a:r>
+          </a:p>
+          <a:p/>
+          <a:p>
+            <a:r>
+              <a:t>### 指定したシェイプを消去</a:t>
+            </a:r>
+          </a:p>
+          <a:p/>
+          <a:p>
+            <a:r>
               <a:t>配付資料には載せたくないシェイプを特殊マーカーで自動消去する機能です。</a:t>
             </a:r>
-            <a:endParaRPr lang="en-US" altLang="ja-JP"/>
-          </a:p>
-          <a:p>
-            <a:endParaRPr lang="ja-JP" altLang="en-US"/>
-          </a:p>
-          <a:p>
-            <a:r>
-              <a:rPr lang="ja-JP" altLang="en-US"/>
-              <a:t>サンプルフォルダ：　</a:t>
-            </a:r>
-            <a:r>
-              <a:rPr lang="en-US" altLang="ja-JP"/>
-              <a:t>pm8_delete_csp</a:t>
-            </a:r>
-          </a:p>
-          <a:p>
-            <a:endParaRPr lang="en-US" altLang="ja-JP"/>
-          </a:p>
-          <a:p>
-            <a:r>
-              <a:rPr kumimoji="1" lang="en-US" altLang="ja-JP" sz="1200" b="0" kern="1200">
-                <a:solidFill>
-                  <a:schemeClr val="tx1"/>
-                </a:solidFill>
-                <a:effectLst/>
-                <a:latin typeface="BIZ UDPゴシック" panose="020B0400000000000000" pitchFamily="50" charset="-128"/>
-                <a:ea typeface="BIZ UDPゴシック" panose="020B0400000000000000" pitchFamily="50" charset="-128"/>
-                <a:cs typeface="+mn-cs"/>
-              </a:rPr>
-              <a:t>[![</a:t>
-            </a:r>
-            <a:r>
-              <a:rPr kumimoji="1" lang="ja-JP" altLang="en-US" sz="1200" b="0" kern="1200">
-                <a:solidFill>
-                  <a:schemeClr val="tx1"/>
-                </a:solidFill>
-                <a:effectLst/>
-                <a:latin typeface="BIZ UDPゴシック" panose="020B0400000000000000" pitchFamily="50" charset="-128"/>
-                <a:ea typeface="BIZ UDPゴシック" panose="020B0400000000000000" pitchFamily="50" charset="-128"/>
-                <a:cs typeface="+mn-cs"/>
-              </a:rPr>
-              <a:t>サンプル：</a:t>
-            </a:r>
-            <a:r>
-              <a:rPr lang="ja-JP" altLang="en-US"/>
-              <a:t>指定したシェイプを消去</a:t>
-            </a:r>
-            <a:r>
-              <a:rPr kumimoji="1" lang="en-US" altLang="ja-JP" sz="1200" b="0" kern="1200">
-                <a:solidFill>
-                  <a:schemeClr val="tx1"/>
-                </a:solidFill>
-                <a:effectLst/>
-                <a:latin typeface="BIZ UDPゴシック" panose="020B0400000000000000" pitchFamily="50" charset="-128"/>
-                <a:ea typeface="BIZ UDPゴシック" panose="020B0400000000000000" pitchFamily="50" charset="-128"/>
-                <a:cs typeface="+mn-cs"/>
-              </a:rPr>
-              <a:t>](../../</a:t>
-            </a:r>
-            <a:r>
-              <a:rPr lang="en-US" altLang="ja-JP"/>
-              <a:t>pm8_delete_csp</a:t>
-            </a:r>
-            <a:r>
-              <a:rPr kumimoji="1" lang="en-US" altLang="ja-JP" sz="1200" b="0" kern="1200">
-                <a:solidFill>
-                  <a:schemeClr val="tx1"/>
-                </a:solidFill>
-                <a:effectLst/>
-                <a:latin typeface="BIZ UDPゴシック" panose="020B0400000000000000" pitchFamily="50" charset="-128"/>
-                <a:ea typeface="BIZ UDPゴシック" panose="020B0400000000000000" pitchFamily="50" charset="-128"/>
-                <a:cs typeface="+mn-cs"/>
-              </a:rPr>
-              <a:t>/build/figures/</a:t>
-            </a:r>
-            <a:r>
-              <a:rPr lang="en-US" altLang="ja-JP"/>
-              <a:t>delete_csp_</a:t>
-            </a:r>
-            <a:r>
-              <a:rPr kumimoji="1" lang="en-US" altLang="ja-JP" sz="1200" b="0" kern="1200">
-                <a:solidFill>
-                  <a:schemeClr val="tx1"/>
-                </a:solidFill>
-                <a:effectLst/>
-                <a:latin typeface="BIZ UDPゴシック" panose="020B0400000000000000" pitchFamily="50" charset="-128"/>
-                <a:ea typeface="BIZ UDPゴシック" panose="020B0400000000000000" pitchFamily="50" charset="-128"/>
-                <a:cs typeface="+mn-cs"/>
-              </a:rPr>
-              <a:t>guide_keyvisual.png/)</a:t>
-            </a:r>
-            <a:r>
-              <a:rPr lang="en-US" altLang="ja-JP"/>
-              <a:t>{ width=90% }</a:t>
-            </a:r>
-            <a:r>
-              <a:rPr kumimoji="1" lang="en-US" altLang="ja-JP" sz="1200" b="0" kern="1200">
-                <a:solidFill>
-                  <a:schemeClr val="tx1"/>
-                </a:solidFill>
-                <a:effectLst/>
-                <a:latin typeface="BIZ UDPゴシック" panose="020B0400000000000000" pitchFamily="50" charset="-128"/>
-                <a:ea typeface="BIZ UDPゴシック" panose="020B0400000000000000" pitchFamily="50" charset="-128"/>
-                <a:cs typeface="+mn-cs"/>
-              </a:rPr>
-              <a:t>](../../</a:t>
-            </a:r>
-            <a:r>
-              <a:rPr lang="en-US" altLang="ja-JP"/>
-              <a:t>pm8_delete_csp</a:t>
-            </a:r>
-            <a:r>
-              <a:rPr kumimoji="1" lang="en-US" altLang="ja-JP" sz="1200" b="0" kern="1200">
-                <a:solidFill>
-                  <a:schemeClr val="tx1"/>
-                </a:solidFill>
-                <a:effectLst/>
-                <a:latin typeface="BIZ UDPゴシック" panose="020B0400000000000000" pitchFamily="50" charset="-128"/>
-                <a:ea typeface="BIZ UDPゴシック" panose="020B0400000000000000" pitchFamily="50" charset="-128"/>
-                <a:cs typeface="+mn-cs"/>
-              </a:rPr>
-              <a:t>/README.md)</a:t>
-            </a:r>
-          </a:p>
-          <a:p>
-            <a:pPr marL="0" marR="0" lvl="0" indent="0" algn="l" defTabSz="914400" rtl="0" eaLnBrk="1" fontAlgn="auto" latinLnBrk="0" hangingPunct="1">
-              <a:lnSpc>
-                <a:spcPct val="100000"/>
-              </a:lnSpc>
-              <a:spcBef>
-                <a:spcPts val="0"/>
-              </a:spcBef>
-              <a:spcAft>
-                <a:spcPts val="0"/>
-              </a:spcAft>
-              <a:buClrTx/>
-              <a:buSzTx/>
-              <a:buFontTx/>
-              <a:buNone/>
-              <a:tabLst/>
-              <a:defRPr/>
-            </a:pPr>
-            <a:br>
-              <a:rPr kumimoji="1" lang="en-US" altLang="ja-JP" sz="1200" b="0" kern="1200">
-                <a:solidFill>
-                  <a:schemeClr val="tx1"/>
-                </a:solidFill>
-                <a:effectLst/>
-                <a:latin typeface="BIZ UDPゴシック" panose="020B0400000000000000" pitchFamily="50" charset="-128"/>
-                <a:ea typeface="BIZ UDPゴシック" panose="020B0400000000000000" pitchFamily="50" charset="-128"/>
-                <a:cs typeface="+mn-cs"/>
-              </a:rPr>
-            </a:br>
-            <a:br>
-              <a:rPr kumimoji="1" lang="en-US" altLang="ja-JP" sz="1200" b="0" kern="1200">
-                <a:solidFill>
-                  <a:schemeClr val="tx1"/>
-                </a:solidFill>
-                <a:effectLst/>
-                <a:latin typeface="BIZ UDPゴシック" panose="020B0400000000000000" pitchFamily="50" charset="-128"/>
-                <a:ea typeface="BIZ UDPゴシック" panose="020B0400000000000000" pitchFamily="50" charset="-128"/>
-                <a:cs typeface="+mn-cs"/>
-              </a:rPr>
-            </a:br>
-            <a:r>
-              <a:rPr lang="en-US" altLang="ja-JP"/>
-              <a:t>```{=latex}</a:t>
-            </a:r>
-          </a:p>
-          <a:p>
-            <a:r>
-              <a:rPr lang="en-US" altLang="ja-JP"/>
-              <a:t>\vfill</a:t>
-            </a:r>
-          </a:p>
-          <a:p>
-            <a:r>
-              <a:rPr lang="en-US" altLang="ja-JP"/>
-              <a:t>\newpage</a:t>
-            </a:r>
-          </a:p>
-          <a:p>
-            <a:pPr marL="0" marR="0" lvl="0" indent="0" algn="l" defTabSz="914400" rtl="0" eaLnBrk="1" fontAlgn="auto" latinLnBrk="0" hangingPunct="1">
-              <a:lnSpc>
-                <a:spcPct val="100000"/>
-              </a:lnSpc>
-              <a:spcBef>
-                <a:spcPts val="0"/>
-              </a:spcBef>
-              <a:spcAft>
-                <a:spcPts val="0"/>
-              </a:spcAft>
-              <a:buClrTx/>
-              <a:buSzTx/>
-              <a:buFontTx/>
-              <a:buNone/>
-              <a:tabLst/>
-              <a:defRPr/>
-            </a:pPr>
-            <a:r>
-              <a:rPr lang="en-US" altLang="ja-JP"/>
-              <a:t>```</a:t>
-            </a:r>
-          </a:p>
-          <a:p>
-            <a:endParaRPr lang="en-US" altLang="ja-JP"/>
-          </a:p>
-          <a:p>
-            <a:r>
-              <a:rPr lang="en-US" altLang="ja-JP"/>
-              <a:t>### </a:t>
-            </a:r>
-            <a:r>
-              <a:rPr lang="ja-JP" altLang="en-US"/>
-              <a:t>指定したスライドを削除</a:t>
-            </a:r>
-            <a:endParaRPr lang="en-US" altLang="ja-JP"/>
-          </a:p>
-          <a:p>
-            <a:endParaRPr lang="ja-JP" altLang="en-US"/>
-          </a:p>
-          <a:p>
-            <a:r>
-              <a:rPr lang="ja-JP" altLang="en-US"/>
+          </a:p>
+          <a:p/>
+          <a:p>
+            <a:r>
+              <a:t>サンプルフォルダ：　pm8_delete_csp</a:t>
+            </a:r>
+          </a:p>
+          <a:p/>
+          <a:p>
+            <a:r>
+              <a:t>[![サンプル：指定したシェイプを消去](../../pm8_delete_csp/build/figures/delete_csp_guide_keyvisual.png/){ width=90% }](../../pm8_delete_csp/README.md)</a:t>
+            </a:r>
+          </a:p>
+          <a:p>
+            <a:br/>
+          </a:p>
+          <a:p/>
+          <a:p>
+            <a:r>
+              <a:t>{{vfill}}</a:t>
+            </a:r>
+          </a:p>
+          <a:p/>
+          <a:p>
+            <a:r>
+              <a:t>{{pagebreak}}</a:t>
+            </a:r>
+          </a:p>
+          <a:p/>
+          <a:p>
+            <a:r>
+              <a:t>### 指定したスライドを削除</a:t>
+            </a:r>
+          </a:p>
+          <a:p/>
+          <a:p>
+            <a:r>
               <a:t>配付資料には載せたくないスライドを特殊マーカーで自動削除する機能です。</a:t>
             </a:r>
-            <a:endParaRPr lang="en-US" altLang="ja-JP"/>
-          </a:p>
-          <a:p>
-            <a:endParaRPr lang="ja-JP" altLang="en-US"/>
-          </a:p>
-          <a:p>
-            <a:r>
-              <a:rPr lang="ja-JP" altLang="en-US"/>
-              <a:t>サンプルフォルダ：　</a:t>
-            </a:r>
-            <a:r>
-              <a:rPr lang="en-US" altLang="ja-JP"/>
-              <a:t>pm9_delete_csl</a:t>
-            </a:r>
-          </a:p>
-          <a:p>
-            <a:endParaRPr lang="en-US" altLang="ja-JP"/>
-          </a:p>
-          <a:p>
-            <a:pPr marL="0" marR="0" lvl="0" indent="0" algn="l" defTabSz="914400" rtl="0" eaLnBrk="1" fontAlgn="auto" latinLnBrk="0" hangingPunct="1">
-              <a:lnSpc>
-                <a:spcPct val="100000"/>
-              </a:lnSpc>
-              <a:spcBef>
-                <a:spcPts val="0"/>
-              </a:spcBef>
-              <a:spcAft>
-                <a:spcPts val="0"/>
-              </a:spcAft>
-              <a:buClrTx/>
-              <a:buSzTx/>
-              <a:buFontTx/>
-              <a:buNone/>
-              <a:tabLst/>
-              <a:defRPr/>
-            </a:pPr>
-            <a:r>
-              <a:rPr kumimoji="1" lang="en-US" altLang="ja-JP" sz="1200" b="0" kern="1200">
-                <a:solidFill>
-                  <a:schemeClr val="tx1"/>
-                </a:solidFill>
-                <a:effectLst/>
-                <a:latin typeface="BIZ UDPゴシック" panose="020B0400000000000000" pitchFamily="50" charset="-128"/>
-                <a:ea typeface="BIZ UDPゴシック" panose="020B0400000000000000" pitchFamily="50" charset="-128"/>
-                <a:cs typeface="+mn-cs"/>
-              </a:rPr>
-              <a:t>[![</a:t>
-            </a:r>
-            <a:r>
-              <a:rPr kumimoji="1" lang="ja-JP" altLang="en-US" sz="1200" b="0" kern="1200">
-                <a:solidFill>
-                  <a:schemeClr val="tx1"/>
-                </a:solidFill>
-                <a:effectLst/>
-                <a:latin typeface="BIZ UDPゴシック" panose="020B0400000000000000" pitchFamily="50" charset="-128"/>
-                <a:ea typeface="BIZ UDPゴシック" panose="020B0400000000000000" pitchFamily="50" charset="-128"/>
-                <a:cs typeface="+mn-cs"/>
-              </a:rPr>
-              <a:t>サンプル：</a:t>
-            </a:r>
-            <a:r>
-              <a:rPr lang="ja-JP" altLang="en-US"/>
-              <a:t>指定したスライドを削除</a:t>
-            </a:r>
-            <a:r>
-              <a:rPr kumimoji="1" lang="en-US" altLang="ja-JP" sz="1200" b="0" kern="1200">
-                <a:solidFill>
-                  <a:schemeClr val="tx1"/>
-                </a:solidFill>
-                <a:effectLst/>
-                <a:latin typeface="BIZ UDPゴシック" panose="020B0400000000000000" pitchFamily="50" charset="-128"/>
-                <a:ea typeface="BIZ UDPゴシック" panose="020B0400000000000000" pitchFamily="50" charset="-128"/>
-                <a:cs typeface="+mn-cs"/>
-              </a:rPr>
-              <a:t>](../../</a:t>
-            </a:r>
-            <a:r>
-              <a:rPr lang="en-US" altLang="ja-JP"/>
-              <a:t>pm9_delete_csl</a:t>
-            </a:r>
-            <a:r>
-              <a:rPr kumimoji="1" lang="en-US" altLang="ja-JP" sz="1200" b="0" kern="1200">
-                <a:solidFill>
-                  <a:schemeClr val="tx1"/>
-                </a:solidFill>
-                <a:effectLst/>
-                <a:latin typeface="BIZ UDPゴシック" panose="020B0400000000000000" pitchFamily="50" charset="-128"/>
-                <a:ea typeface="BIZ UDPゴシック" panose="020B0400000000000000" pitchFamily="50" charset="-128"/>
-                <a:cs typeface="+mn-cs"/>
-              </a:rPr>
-              <a:t>/build/figures/</a:t>
-            </a:r>
-            <a:r>
-              <a:rPr lang="en-US" altLang="ja-JP"/>
-              <a:t>delete_csl_</a:t>
-            </a:r>
-            <a:r>
-              <a:rPr kumimoji="1" lang="en-US" altLang="ja-JP" sz="1200" b="0" kern="1200">
-                <a:solidFill>
-                  <a:schemeClr val="tx1"/>
-                </a:solidFill>
-                <a:effectLst/>
-                <a:latin typeface="BIZ UDPゴシック" panose="020B0400000000000000" pitchFamily="50" charset="-128"/>
-                <a:ea typeface="BIZ UDPゴシック" panose="020B0400000000000000" pitchFamily="50" charset="-128"/>
-                <a:cs typeface="+mn-cs"/>
-              </a:rPr>
-              <a:t>guide_keyvisual.png/)</a:t>
-            </a:r>
-            <a:r>
-              <a:rPr lang="en-US" altLang="ja-JP"/>
-              <a:t>{ width=90% }</a:t>
-            </a:r>
-            <a:r>
-              <a:rPr kumimoji="1" lang="en-US" altLang="ja-JP" sz="1200" b="0" kern="1200">
-                <a:solidFill>
-                  <a:schemeClr val="tx1"/>
-                </a:solidFill>
-                <a:effectLst/>
-                <a:latin typeface="BIZ UDPゴシック" panose="020B0400000000000000" pitchFamily="50" charset="-128"/>
-                <a:ea typeface="BIZ UDPゴシック" panose="020B0400000000000000" pitchFamily="50" charset="-128"/>
-                <a:cs typeface="+mn-cs"/>
-              </a:rPr>
-              <a:t>](../../</a:t>
-            </a:r>
-            <a:r>
-              <a:rPr lang="en-US" altLang="ja-JP"/>
-              <a:t>pm9_delete_csl</a:t>
-            </a:r>
-            <a:r>
-              <a:rPr kumimoji="1" lang="en-US" altLang="ja-JP" sz="1200" b="0" kern="1200">
-                <a:solidFill>
-                  <a:schemeClr val="tx1"/>
-                </a:solidFill>
-                <a:effectLst/>
-                <a:latin typeface="BIZ UDPゴシック" panose="020B0400000000000000" pitchFamily="50" charset="-128"/>
-                <a:ea typeface="BIZ UDPゴシック" panose="020B0400000000000000" pitchFamily="50" charset="-128"/>
-                <a:cs typeface="+mn-cs"/>
-              </a:rPr>
-              <a:t>/README.md)</a:t>
-            </a:r>
-          </a:p>
-          <a:p>
-            <a:pPr marL="0" marR="0" lvl="0" indent="0" algn="l" defTabSz="914400" rtl="0" eaLnBrk="1" fontAlgn="auto" latinLnBrk="0" hangingPunct="1">
-              <a:lnSpc>
-                <a:spcPct val="100000"/>
-              </a:lnSpc>
-              <a:spcBef>
-                <a:spcPts val="0"/>
-              </a:spcBef>
-              <a:spcAft>
-                <a:spcPts val="0"/>
-              </a:spcAft>
-              <a:buClrTx/>
-              <a:buSzTx/>
-              <a:buFontTx/>
-              <a:buNone/>
-              <a:tabLst/>
-              <a:defRPr/>
-            </a:pPr>
-            <a:br>
-              <a:rPr kumimoji="1" lang="en-US" altLang="ja-JP" sz="1200" b="0" kern="1200">
-                <a:solidFill>
-                  <a:schemeClr val="tx1"/>
-                </a:solidFill>
-                <a:effectLst/>
-                <a:latin typeface="BIZ UDPゴシック" panose="020B0400000000000000" pitchFamily="50" charset="-128"/>
-                <a:ea typeface="BIZ UDPゴシック" panose="020B0400000000000000" pitchFamily="50" charset="-128"/>
-                <a:cs typeface="+mn-cs"/>
-              </a:rPr>
-            </a:br>
-            <a:br>
-              <a:rPr kumimoji="1" lang="en-US" altLang="ja-JP" sz="1200" b="0" kern="1200">
-                <a:solidFill>
-                  <a:schemeClr val="tx1"/>
-                </a:solidFill>
-                <a:effectLst/>
-                <a:latin typeface="BIZ UDPゴシック" panose="020B0400000000000000" pitchFamily="50" charset="-128"/>
-                <a:ea typeface="BIZ UDPゴシック" panose="020B0400000000000000" pitchFamily="50" charset="-128"/>
-                <a:cs typeface="+mn-cs"/>
-              </a:rPr>
-            </a:br>
-            <a:r>
-              <a:rPr lang="en-US" altLang="ja-JP"/>
-              <a:t>```{=latex}</a:t>
-            </a:r>
-          </a:p>
-          <a:p>
-            <a:r>
-              <a:rPr lang="en-US" altLang="ja-JP"/>
-              <a:t>\par\vspace{5\baselineskip}</a:t>
-            </a:r>
-          </a:p>
-          <a:p>
-            <a:pPr marL="0" marR="0" lvl="0" indent="0" algn="l" defTabSz="914400" rtl="0" eaLnBrk="1" fontAlgn="auto" latinLnBrk="0" hangingPunct="1">
-              <a:lnSpc>
-                <a:spcPct val="100000"/>
-              </a:lnSpc>
-              <a:spcBef>
-                <a:spcPts val="0"/>
-              </a:spcBef>
-              <a:spcAft>
-                <a:spcPts val="0"/>
-              </a:spcAft>
-              <a:buClrTx/>
-              <a:buSzTx/>
-              <a:buFontTx/>
-              <a:buNone/>
-              <a:tabLst/>
-              <a:defRPr/>
-            </a:pPr>
-            <a:r>
-              <a:rPr lang="en-US" altLang="ja-JP"/>
-              <a:t>```</a:t>
-            </a:r>
-          </a:p>
-          <a:p>
-            <a:endParaRPr lang="en-US" altLang="ja-JP"/>
-          </a:p>
-          <a:p>
-            <a:r>
-              <a:rPr lang="en-US" altLang="ja-JP"/>
-              <a:t>### </a:t>
-            </a:r>
-            <a:r>
-              <a:rPr lang="ja-JP" altLang="en-US"/>
-              <a:t>作業用のメモを書く</a:t>
-            </a:r>
-            <a:endParaRPr lang="en-US" altLang="ja-JP"/>
-          </a:p>
-          <a:p>
-            <a:endParaRPr lang="ja-JP" altLang="en-US"/>
-          </a:p>
-          <a:p>
-            <a:r>
-              <a:rPr lang="ja-JP" altLang="en-US"/>
+          </a:p>
+          <a:p/>
+          <a:p>
+            <a:r>
+              <a:t>サンプルフォルダ：　pm9_delete_csl</a:t>
+            </a:r>
+          </a:p>
+          <a:p/>
+          <a:p>
+            <a:r>
+              <a:t>[![サンプル：指定したスライドを削除](../../pm9_delete_csl/build/figures/delete_csl_guide_keyvisual.png/){ width=90% }](../../pm9_delete_csl/README.md)</a:t>
+            </a:r>
+          </a:p>
+          <a:p>
+            <a:br/>
+          </a:p>
+          <a:p/>
+          <a:p>
+            <a:r>
+              <a:t>{{vspace:5}}</a:t>
+            </a:r>
+          </a:p>
+          <a:p/>
+          <a:p>
+            <a:r>
+              <a:t>### 作業用のメモを書く</a:t>
+            </a:r>
+          </a:p>
+          <a:p/>
+          <a:p>
+            <a:r>
               <a:t>原稿制作中の一時的メモなど、 「後で見直す部分に貼っておく付箋紙」 のような用途に使う機能です。</a:t>
             </a:r>
           </a:p>
-          <a:p>
-            <a:endParaRPr lang="ja-JP" altLang="en-US"/>
-          </a:p>
-          <a:p>
-            <a:r>
-              <a:rPr lang="ja-JP" altLang="en-US"/>
-              <a:t>サンプルフォルダ：　</a:t>
-            </a:r>
-            <a:r>
-              <a:rPr lang="en-US" altLang="ja-JP"/>
-              <a:t>pm10_memo_temp</a:t>
-            </a:r>
-          </a:p>
-          <a:p>
-            <a:endParaRPr lang="en-US" altLang="ja-JP"/>
-          </a:p>
-          <a:p>
-            <a:r>
-              <a:rPr kumimoji="1" lang="en-US" altLang="ja-JP" sz="1200" b="0" kern="1200">
-                <a:solidFill>
-                  <a:schemeClr val="tx1"/>
-                </a:solidFill>
-                <a:effectLst/>
-                <a:latin typeface="BIZ UDPゴシック" panose="020B0400000000000000" pitchFamily="50" charset="-128"/>
-                <a:ea typeface="BIZ UDPゴシック" panose="020B0400000000000000" pitchFamily="50" charset="-128"/>
-                <a:cs typeface="+mn-cs"/>
-              </a:rPr>
-              <a:t>[![</a:t>
-            </a:r>
-            <a:r>
-              <a:rPr kumimoji="1" lang="ja-JP" altLang="en-US" sz="1200" b="0" kern="1200">
-                <a:solidFill>
-                  <a:schemeClr val="tx1"/>
-                </a:solidFill>
-                <a:effectLst/>
-                <a:latin typeface="BIZ UDPゴシック" panose="020B0400000000000000" pitchFamily="50" charset="-128"/>
-                <a:ea typeface="BIZ UDPゴシック" panose="020B0400000000000000" pitchFamily="50" charset="-128"/>
-                <a:cs typeface="+mn-cs"/>
-              </a:rPr>
-              <a:t>サンプル：</a:t>
-            </a:r>
-            <a:r>
-              <a:rPr lang="ja-JP" altLang="en-US"/>
-              <a:t>作業用のメモを書く</a:t>
-            </a:r>
-            <a:r>
-              <a:rPr kumimoji="1" lang="en-US" altLang="ja-JP" sz="1200" b="0" kern="1200">
-                <a:solidFill>
-                  <a:schemeClr val="tx1"/>
-                </a:solidFill>
-                <a:effectLst/>
-                <a:latin typeface="BIZ UDPゴシック" panose="020B0400000000000000" pitchFamily="50" charset="-128"/>
-                <a:ea typeface="BIZ UDPゴシック" panose="020B0400000000000000" pitchFamily="50" charset="-128"/>
-                <a:cs typeface="+mn-cs"/>
-              </a:rPr>
-              <a:t>](../../</a:t>
-            </a:r>
-            <a:r>
-              <a:rPr lang="en-US" altLang="ja-JP"/>
-              <a:t>pm10_memo_temp</a:t>
-            </a:r>
-            <a:r>
-              <a:rPr kumimoji="1" lang="en-US" altLang="ja-JP" sz="1200" b="0" kern="1200">
-                <a:solidFill>
-                  <a:schemeClr val="tx1"/>
-                </a:solidFill>
-                <a:effectLst/>
-                <a:latin typeface="BIZ UDPゴシック" panose="020B0400000000000000" pitchFamily="50" charset="-128"/>
-                <a:ea typeface="BIZ UDPゴシック" panose="020B0400000000000000" pitchFamily="50" charset="-128"/>
-                <a:cs typeface="+mn-cs"/>
-              </a:rPr>
-              <a:t>/build/figures/</a:t>
-            </a:r>
-            <a:r>
-              <a:rPr lang="en-US" altLang="ja-JP"/>
-              <a:t>memo_temp_</a:t>
-            </a:r>
-            <a:r>
-              <a:rPr kumimoji="1" lang="en-US" altLang="ja-JP" sz="1200" b="0" kern="1200">
-                <a:solidFill>
-                  <a:schemeClr val="tx1"/>
-                </a:solidFill>
-                <a:effectLst/>
-                <a:latin typeface="BIZ UDPゴシック" panose="020B0400000000000000" pitchFamily="50" charset="-128"/>
-                <a:ea typeface="BIZ UDPゴシック" panose="020B0400000000000000" pitchFamily="50" charset="-128"/>
-                <a:cs typeface="+mn-cs"/>
-              </a:rPr>
-              <a:t>guide_keyvisual.png/)</a:t>
-            </a:r>
-            <a:r>
-              <a:rPr lang="en-US" altLang="ja-JP"/>
-              <a:t>{ width=90% }</a:t>
-            </a:r>
-            <a:r>
-              <a:rPr kumimoji="1" lang="en-US" altLang="ja-JP" sz="1200" b="0" kern="1200">
-                <a:solidFill>
-                  <a:schemeClr val="tx1"/>
-                </a:solidFill>
-                <a:effectLst/>
-                <a:latin typeface="BIZ UDPゴシック" panose="020B0400000000000000" pitchFamily="50" charset="-128"/>
-                <a:ea typeface="BIZ UDPゴシック" panose="020B0400000000000000" pitchFamily="50" charset="-128"/>
-                <a:cs typeface="+mn-cs"/>
-              </a:rPr>
-              <a:t>](../../</a:t>
-            </a:r>
-            <a:r>
-              <a:rPr lang="en-US" altLang="ja-JP"/>
-              <a:t>pm10_memo_temp</a:t>
-            </a:r>
-            <a:r>
-              <a:rPr kumimoji="1" lang="en-US" altLang="ja-JP" sz="1200" b="0" kern="1200">
-                <a:solidFill>
-                  <a:schemeClr val="tx1"/>
-                </a:solidFill>
-                <a:effectLst/>
-                <a:latin typeface="BIZ UDPゴシック" panose="020B0400000000000000" pitchFamily="50" charset="-128"/>
-                <a:ea typeface="BIZ UDPゴシック" panose="020B0400000000000000" pitchFamily="50" charset="-128"/>
-                <a:cs typeface="+mn-cs"/>
-              </a:rPr>
-              <a:t>/README.md)</a:t>
-            </a:r>
-          </a:p>
-          <a:p>
-            <a:pPr marL="0" marR="0" lvl="0" indent="0" algn="l" defTabSz="914400" rtl="0" eaLnBrk="1" fontAlgn="auto" latinLnBrk="0" hangingPunct="1">
-              <a:lnSpc>
-                <a:spcPct val="100000"/>
-              </a:lnSpc>
-              <a:spcBef>
-                <a:spcPts val="0"/>
-              </a:spcBef>
-              <a:spcAft>
-                <a:spcPts val="0"/>
-              </a:spcAft>
-              <a:buClrTx/>
-              <a:buSzTx/>
-              <a:buFontTx/>
-              <a:buNone/>
-              <a:tabLst/>
-              <a:defRPr/>
-            </a:pPr>
-            <a:br>
-              <a:rPr kumimoji="1" lang="en-US" altLang="ja-JP" sz="1200" b="0" kern="1200">
-                <a:solidFill>
-                  <a:schemeClr val="tx1"/>
-                </a:solidFill>
-                <a:effectLst/>
-                <a:latin typeface="BIZ UDPゴシック" panose="020B0400000000000000" pitchFamily="50" charset="-128"/>
-                <a:ea typeface="BIZ UDPゴシック" panose="020B0400000000000000" pitchFamily="50" charset="-128"/>
-                <a:cs typeface="+mn-cs"/>
-              </a:rPr>
-            </a:br>
-            <a:br>
-              <a:rPr kumimoji="1" lang="en-US" altLang="ja-JP" sz="1200" b="0" kern="1200">
-                <a:solidFill>
-                  <a:schemeClr val="tx1"/>
-                </a:solidFill>
-                <a:effectLst/>
-                <a:latin typeface="BIZ UDPゴシック" panose="020B0400000000000000" pitchFamily="50" charset="-128"/>
-                <a:ea typeface="BIZ UDPゴシック" panose="020B0400000000000000" pitchFamily="50" charset="-128"/>
-                <a:cs typeface="+mn-cs"/>
-              </a:rPr>
-            </a:br>
-            <a:r>
-              <a:rPr lang="en-US" altLang="ja-JP"/>
-              <a:t>```{=latex}</a:t>
-            </a:r>
-          </a:p>
-          <a:p>
-            <a:r>
-              <a:rPr lang="en-US" altLang="ja-JP"/>
-              <a:t>\vfill</a:t>
-            </a:r>
-          </a:p>
-          <a:p>
-            <a:r>
-              <a:rPr lang="en-US" altLang="ja-JP"/>
-              <a:t>\newpage</a:t>
-            </a:r>
-          </a:p>
-          <a:p>
-            <a:pPr marL="0" marR="0" lvl="0" indent="0" algn="l" defTabSz="914400" rtl="0" eaLnBrk="1" fontAlgn="auto" latinLnBrk="0" hangingPunct="1">
-              <a:lnSpc>
-                <a:spcPct val="100000"/>
-              </a:lnSpc>
-              <a:spcBef>
-                <a:spcPts val="0"/>
-              </a:spcBef>
-              <a:spcAft>
-                <a:spcPts val="0"/>
-              </a:spcAft>
-              <a:buClrTx/>
-              <a:buSzTx/>
-              <a:buFontTx/>
-              <a:buNone/>
-              <a:tabLst/>
-              <a:defRPr/>
-            </a:pPr>
-            <a:r>
-              <a:rPr lang="en-US" altLang="ja-JP"/>
-              <a:t>```</a:t>
-            </a:r>
-          </a:p>
-          <a:p>
-            <a:endParaRPr lang="en-US" altLang="ja-JP"/>
-          </a:p>
-          <a:p>
-            <a:r>
-              <a:rPr lang="en-US" altLang="ja-JP"/>
-              <a:t>### </a:t>
-            </a:r>
-            <a:r>
-              <a:rPr kumimoji="1" lang="ja-JP" altLang="en-US" sz="1200" kern="0">
-                <a:latin typeface="BIZ UDPゴシック" panose="020B0400000000000000" pitchFamily="50" charset="-128"/>
-                <a:ea typeface="BIZ UDPゴシック" panose="020B0400000000000000" pitchFamily="50" charset="-128"/>
-              </a:rPr>
-              <a:t>特殊定数を置換する</a:t>
-            </a:r>
-            <a:endParaRPr lang="en-US" altLang="ja-JP"/>
-          </a:p>
-          <a:p>
-            <a:endParaRPr lang="ja-JP" altLang="en-US"/>
-          </a:p>
-          <a:p>
-            <a:r>
-              <a:rPr lang="ja-JP" altLang="en-US"/>
-              <a:t>ソース</a:t>
-            </a:r>
-            <a:r>
-              <a:rPr lang="en-US" altLang="ja-JP"/>
-              <a:t>pptx</a:t>
-            </a:r>
-            <a:r>
-              <a:rPr lang="ja-JP" altLang="en-US"/>
-              <a:t>のファイル名やスライド番号、スライドタイトルに置換される特殊定数機能です。</a:t>
-            </a:r>
-          </a:p>
-          <a:p>
-            <a:endParaRPr lang="ja-JP" altLang="en-US"/>
-          </a:p>
-          <a:p>
-            <a:r>
-              <a:rPr lang="ja-JP" altLang="en-US"/>
-              <a:t>サンプルフォルダ：　</a:t>
-            </a:r>
-            <a:r>
-              <a:rPr lang="en-US" altLang="ja-JP"/>
-              <a:t>pm11_title_filename</a:t>
-            </a:r>
-          </a:p>
-          <a:p>
-            <a:endParaRPr lang="en-US" altLang="ja-JP"/>
-          </a:p>
-          <a:p>
-            <a:r>
-              <a:rPr kumimoji="1" lang="en-US" altLang="ja-JP" sz="1200" b="0" kern="1200">
-                <a:solidFill>
-                  <a:schemeClr val="tx1"/>
-                </a:solidFill>
-                <a:effectLst/>
-                <a:latin typeface="BIZ UDPゴシック" panose="020B0400000000000000" pitchFamily="50" charset="-128"/>
-                <a:ea typeface="BIZ UDPゴシック" panose="020B0400000000000000" pitchFamily="50" charset="-128"/>
-                <a:cs typeface="+mn-cs"/>
-              </a:rPr>
-              <a:t>[![</a:t>
-            </a:r>
-            <a:r>
-              <a:rPr kumimoji="1" lang="ja-JP" altLang="en-US" sz="1200" b="0" kern="1200">
-                <a:solidFill>
-                  <a:schemeClr val="tx1"/>
-                </a:solidFill>
-                <a:effectLst/>
-                <a:latin typeface="BIZ UDPゴシック" panose="020B0400000000000000" pitchFamily="50" charset="-128"/>
-                <a:ea typeface="BIZ UDPゴシック" panose="020B0400000000000000" pitchFamily="50" charset="-128"/>
-                <a:cs typeface="+mn-cs"/>
-              </a:rPr>
-              <a:t>サンプル：</a:t>
-            </a:r>
-            <a:r>
-              <a:rPr kumimoji="1" lang="ja-JP" altLang="en-US" sz="1200" kern="0">
-                <a:latin typeface="BIZ UDPゴシック" panose="020B0400000000000000" pitchFamily="50" charset="-128"/>
-                <a:ea typeface="BIZ UDPゴシック" panose="020B0400000000000000" pitchFamily="50" charset="-128"/>
-              </a:rPr>
-              <a:t>特殊定数を置換する</a:t>
-            </a:r>
-            <a:r>
-              <a:rPr kumimoji="1" lang="en-US" altLang="ja-JP" sz="1200" b="0" kern="1200">
-                <a:solidFill>
-                  <a:schemeClr val="tx1"/>
-                </a:solidFill>
-                <a:effectLst/>
-                <a:latin typeface="BIZ UDPゴシック" panose="020B0400000000000000" pitchFamily="50" charset="-128"/>
-                <a:ea typeface="BIZ UDPゴシック" panose="020B0400000000000000" pitchFamily="50" charset="-128"/>
-                <a:cs typeface="+mn-cs"/>
-              </a:rPr>
-              <a:t>](../../</a:t>
-            </a:r>
-            <a:r>
-              <a:rPr lang="en-US" altLang="ja-JP"/>
-              <a:t>pm11_title_filename</a:t>
-            </a:r>
-            <a:r>
-              <a:rPr kumimoji="1" lang="en-US" altLang="ja-JP" sz="1200" b="0" kern="1200">
-                <a:solidFill>
-                  <a:schemeClr val="tx1"/>
-                </a:solidFill>
-                <a:effectLst/>
-                <a:latin typeface="BIZ UDPゴシック" panose="020B0400000000000000" pitchFamily="50" charset="-128"/>
-                <a:ea typeface="BIZ UDPゴシック" panose="020B0400000000000000" pitchFamily="50" charset="-128"/>
-                <a:cs typeface="+mn-cs"/>
-              </a:rPr>
-              <a:t>/build/figures/</a:t>
-            </a:r>
-            <a:r>
-              <a:rPr lang="en-US" altLang="ja-JP"/>
-              <a:t>title_filename_</a:t>
-            </a:r>
-            <a:r>
-              <a:rPr kumimoji="1" lang="en-US" altLang="ja-JP" sz="1200" b="0" kern="1200">
-                <a:solidFill>
-                  <a:schemeClr val="tx1"/>
-                </a:solidFill>
-                <a:effectLst/>
-                <a:latin typeface="BIZ UDPゴシック" panose="020B0400000000000000" pitchFamily="50" charset="-128"/>
-                <a:ea typeface="BIZ UDPゴシック" panose="020B0400000000000000" pitchFamily="50" charset="-128"/>
-                <a:cs typeface="+mn-cs"/>
-              </a:rPr>
-              <a:t>guide_keyvisual.png/)</a:t>
-            </a:r>
-            <a:r>
-              <a:rPr lang="en-US" altLang="ja-JP"/>
-              <a:t>{ width=90% }</a:t>
-            </a:r>
-            <a:r>
-              <a:rPr kumimoji="1" lang="en-US" altLang="ja-JP" sz="1200" b="0" kern="1200">
-                <a:solidFill>
-                  <a:schemeClr val="tx1"/>
-                </a:solidFill>
-                <a:effectLst/>
-                <a:latin typeface="BIZ UDPゴシック" panose="020B0400000000000000" pitchFamily="50" charset="-128"/>
-                <a:ea typeface="BIZ UDPゴシック" panose="020B0400000000000000" pitchFamily="50" charset="-128"/>
-                <a:cs typeface="+mn-cs"/>
-              </a:rPr>
-              <a:t>](../../</a:t>
-            </a:r>
-            <a:r>
-              <a:rPr lang="en-US" altLang="ja-JP"/>
-              <a:t>pm11_title_filename</a:t>
-            </a:r>
-            <a:r>
-              <a:rPr kumimoji="1" lang="en-US" altLang="ja-JP" sz="1200" b="0" kern="1200">
-                <a:solidFill>
-                  <a:schemeClr val="tx1"/>
-                </a:solidFill>
-                <a:effectLst/>
-                <a:latin typeface="BIZ UDPゴシック" panose="020B0400000000000000" pitchFamily="50" charset="-128"/>
-                <a:ea typeface="BIZ UDPゴシック" panose="020B0400000000000000" pitchFamily="50" charset="-128"/>
-                <a:cs typeface="+mn-cs"/>
-              </a:rPr>
-              <a:t>/README.md)</a:t>
-            </a:r>
-          </a:p>
-          <a:p>
-            <a:br>
-              <a:rPr kumimoji="1" lang="en-US" altLang="ja-JP" sz="1200" b="0" kern="1200">
-                <a:solidFill>
-                  <a:schemeClr val="tx1"/>
-                </a:solidFill>
-                <a:effectLst/>
-                <a:latin typeface="BIZ UDPゴシック" panose="020B0400000000000000" pitchFamily="50" charset="-128"/>
-                <a:ea typeface="BIZ UDPゴシック" panose="020B0400000000000000" pitchFamily="50" charset="-128"/>
-                <a:cs typeface="+mn-cs"/>
-              </a:rPr>
-            </a:br>
-            <a:endParaRPr kumimoji="1" lang="en-US" altLang="ja-JP" sz="1200" b="0" kern="1200">
-              <a:solidFill>
-                <a:schemeClr val="tx1"/>
-              </a:solidFill>
-              <a:effectLst/>
-              <a:latin typeface="BIZ UDPゴシック" panose="020B0400000000000000" pitchFamily="50" charset="-128"/>
-              <a:ea typeface="BIZ UDPゴシック" panose="020B0400000000000000" pitchFamily="50" charset="-128"/>
-              <a:cs typeface="+mn-cs"/>
-            </a:endParaRPr>
+          <a:p/>
+          <a:p>
+            <a:r>
+              <a:t>サンプルフォルダ：　pm10_memo_temp</a:t>
+            </a:r>
+          </a:p>
+          <a:p/>
+          <a:p>
+            <a:r>
+              <a:t>[![サンプル：作業用のメモを書く](../../pm10_memo_temp/build/figures/memo_temp_guide_keyvisual.png/){ width=90% }](../../pm10_memo_temp/README.md)</a:t>
+            </a:r>
+          </a:p>
+          <a:p>
+            <a:br/>
+          </a:p>
+          <a:p/>
+          <a:p>
+            <a:r>
+              <a:t>{{vfill}}</a:t>
+            </a:r>
+          </a:p>
+          <a:p/>
+          <a:p>
+            <a:r>
+              <a:t>{{pagebreak}}</a:t>
+            </a:r>
+          </a:p>
+          <a:p/>
+          <a:p>
+            <a:r>
+              <a:t>### 特殊定数を置換する</a:t>
+            </a:r>
+          </a:p>
+          <a:p/>
+          <a:p>
+            <a:r>
+              <a:t>ソースpptxのファイル名やスライド番号、スライドタイトルに置換される特殊定数機能です。</a:t>
+            </a:r>
+          </a:p>
+          <a:p/>
+          <a:p>
+            <a:r>
+              <a:t>サンプルフォルダ：　pm11_title_filename</a:t>
+            </a:r>
+          </a:p>
+          <a:p/>
+          <a:p>
+            <a:r>
+              <a:t>[![サンプル：特殊定数を置換する](../../pm11_title_filename/build/figures/title_filename_guide_keyvisual.png/){ width=90% }](../../pm11_title_filename/README.md)</a:t>
+            </a:r>
+          </a:p>
+          <a:p>
+            <a:br/>
           </a:p>
         </p:txBody>
       </p:sp>
@@ -5762,9 +3371,7 @@
               <a:t>NOTE_CONTENT_FORMAT: 1.0</a:t>
             </a:r>
           </a:p>
-          <a:p>
-            <a:endParaRPr/>
-          </a:p>
+          <a:p/>
           <a:p>
             <a:r>
               <a:t>===BLOCK===</a:t>
@@ -5775,9 +3382,7 @@
               <a:t>{{BLOCK:IMAGE}}</a:t>
             </a:r>
           </a:p>
-          <a:p>
-            <a:endParaRPr/>
-          </a:p>
+          <a:p/>
           <a:p>
             <a:r>
               <a:t>export-image-mode: slide_with_rectpct</a:t>
@@ -5790,21 +3395,10 @@
           </a:p>
           <a:p>
             <a:r>
-              <a:rPr lang="en-US"/>
-              <a:t>export-image: </a:t>
-            </a:r>
-            <a:r>
-              <a:rPr lang="en-US" altLang="ja-JP"/>
-              <a:t>../</a:t>
-            </a:r>
-            <a:r>
-              <a:rPr lang="en-US"/>
-              <a:t>extracted/figures/&lt;__BASEFILENAME__&gt;_slide&lt;__SLIDENUM__&gt;_fig.png</a:t>
-            </a:r>
-          </a:p>
-          <a:p>
-            <a:endParaRPr/>
-          </a:p>
+              <a:t>export-image: ../extracted/figures/&lt;__BASEFILENAME__&gt;_slide&lt;__SLIDENUM__&gt;_fig.png</a:t>
+            </a:r>
+          </a:p>
+          <a:p/>
           <a:p>
             <a:r>
               <a:t>===BLOCK===</a:t>
@@ -5815,156 +3409,71 @@
               <a:t>{{BLOCK:MD:LONG}}</a:t>
             </a:r>
           </a:p>
-          <a:p>
-            <a:endParaRPr/>
-          </a:p>
-          <a:p>
-            <a:r>
-              <a:rPr lang="en-US"/>
-              <a:t>export-note: </a:t>
-            </a:r>
-            <a:r>
-              <a:rPr lang="en-US" altLang="ja-JP"/>
-              <a:t>../</a:t>
-            </a:r>
-            <a:r>
-              <a:rPr lang="en-US"/>
-              <a:t>extracted/&lt;__BASEFILENAME__&gt;_slide&lt;__SLIDENUM__&gt;_md.md</a:t>
-            </a:r>
-          </a:p>
-          <a:p>
-            <a:r>
-              <a:rPr lang="en-US"/>
+          <a:p/>
+          <a:p>
+            <a:r>
+              <a:t>export-note: ../extracted/&lt;__BASEFILENAME__&gt;_slide&lt;__SLIDENUM__&gt;_md.md</a:t>
+            </a:r>
+          </a:p>
+          <a:p>
+            <a:r>
               <a:t>{{#id:section:&lt;__BASEFILENAME__&gt;:slide&lt;__SLIDENUM__&gt;}}</a:t>
             </a:r>
           </a:p>
           <a:p>
             <a:r>
-              <a:rPr lang="en-US"/>
               <a:t>## &lt;__TITLE__&gt;</a:t>
             </a:r>
           </a:p>
-          <a:p>
-            <a:endParaRPr/>
-          </a:p>
+          <a:p/>
           <a:p>
             <a:r>
               <a:t>このツールは、研修用テキストや業務マニュアルなど、「仕事を教える、手順を決める」ための資料を PowerPoint で大量に作る企業/個人のためのツールです。</a:t>
             </a:r>
           </a:p>
-          <a:p>
-            <a:endParaRPr lang="en-US"/>
-          </a:p>
-          <a:p>
-            <a:r>
-              <a:rPr lang="ja-JP" altLang="en-US"/>
+          <a:p/>
+          <a:p>
+            <a:r>
               <a:t>その種のテキストを作る時によくある悩みとはなんでしょう？</a:t>
             </a:r>
-            <a:endParaRPr lang="en-US"/>
-          </a:p>
-          <a:p>
-            <a:endParaRPr/>
-          </a:p>
-          <a:p>
-            <a:r>
-              <a:t>```{=latex}</a:t>
-            </a:r>
-          </a:p>
-          <a:p>
-            <a:r>
-              <a:t>\begin{center}</a:t>
-            </a:r>
-          </a:p>
-          <a:p>
-            <a:r>
-              <a:t>```</a:t>
-            </a:r>
-          </a:p>
-          <a:p>
-            <a:endParaRPr/>
-          </a:p>
-          <a:p>
-            <a:r>
-              <a:rPr lang="en-US"/>
+          </a:p>
+          <a:p/>
+          <a:p>
+            <a:r>
+              <a:t>::: {.center}</a:t>
+            </a:r>
+          </a:p>
+          <a:p/>
+          <a:p>
+            <a:r>
               <a:t>![](figures/&lt;__BASEFILENAME__&gt;_slide&lt;__SLIDENUM__&gt;_fig.png){ width=95% }</a:t>
             </a:r>
           </a:p>
-          <a:p>
-            <a:endParaRPr/>
-          </a:p>
-          <a:p>
-            <a:r>
-              <a:t>```{=latex}</a:t>
-            </a:r>
-          </a:p>
-          <a:p>
-            <a:r>
-              <a:t>\end{center}</a:t>
-            </a:r>
-          </a:p>
-          <a:p>
-            <a:r>
-              <a:t>```</a:t>
-            </a:r>
-          </a:p>
-          <a:p>
-            <a:endParaRPr lang="en-US"/>
-          </a:p>
-          <a:p>
-            <a:r>
-              <a:rPr lang="ja-JP" altLang="en-US"/>
-              <a:t>たとえば、文書のバリエーションが増えすぎて収集がつかなくなる。　章・節番号をつけるのが面倒くさい。　講師用と受講者用の</a:t>
-            </a:r>
-            <a:r>
-              <a:rPr lang="en-US" altLang="ja-JP"/>
-              <a:t>2</a:t>
-            </a:r>
-            <a:r>
-              <a:rPr lang="ja-JP" altLang="en-US"/>
-              <a:t>種類を作らなきゃいけないのが面倒くさい！</a:t>
-            </a:r>
-            <a:endParaRPr lang="en-US" altLang="ja-JP"/>
-          </a:p>
-          <a:p>
-            <a:endParaRPr lang="en-US" altLang="ja-JP"/>
-          </a:p>
-          <a:p>
-            <a:r>
-              <a:rPr lang="ja-JP" altLang="en-US"/>
+          <a:p/>
+          <a:p>
+            <a:r>
+              <a:t>:::</a:t>
+            </a:r>
+          </a:p>
+          <a:p/>
+          <a:p>
+            <a:r>
+              <a:t>たとえば、文書のバリエーションが増えすぎて収集がつかなくなる。　章・節番号をつけるのが面倒くさい。　講師用と受講者用の2種類を作らなきゃいけないのが面倒くさい！</a:t>
+            </a:r>
+          </a:p>
+          <a:p/>
+          <a:p>
+            <a:r>
               <a:t>こんな問題を解決するために作ったツールです。</a:t>
             </a:r>
-            <a:endParaRPr lang="en-US" altLang="ja-JP"/>
-          </a:p>
-          <a:p>
-            <a:endParaRPr lang="en-US"/>
-          </a:p>
-          <a:p>
-            <a:r>
-              <a:rPr lang="ja-JP" altLang="en-US"/>
-              <a:t>そのために、</a:t>
-            </a:r>
-            <a:r>
-              <a:t>「pptxファイルを文書部品として扱</a:t>
-            </a:r>
-            <a:r>
-              <a:rPr lang="ja-JP" altLang="en-US"/>
-              <a:t>い、必要に応じて結合する」</a:t>
-            </a:r>
-            <a:r>
-              <a:t> というコンセプト</a:t>
-            </a:r>
-            <a:r>
-              <a:rPr lang="ja-JP" altLang="en-US"/>
-              <a:t>を採用したものです。まずはその背景から詳しくお話ししましょう</a:t>
-            </a:r>
-            <a:r>
-              <a:t>。</a:t>
-            </a:r>
-            <a:endParaRPr lang="en-US"/>
-          </a:p>
-          <a:p>
-            <a:endParaRPr/>
-          </a:p>
+          </a:p>
+          <a:p/>
+          <a:p>
+            <a:r>
+              <a:t>そのために、「pptxファイルを文書部品として扱い、必要に応じて結合する」 というコンセプトを採用したものです。まずはその背景から詳しくお話ししましょう。</a:t>
+            </a:r>
+          </a:p>
+          <a:p/>
         </p:txBody>
       </p:sp>
       <p:sp>
@@ -6075,9 +3584,7 @@
               <a:t>NOTE_CONTENT_FORMAT: 1.0</a:t>
             </a:r>
           </a:p>
-          <a:p>
-            <a:endParaRPr/>
-          </a:p>
+          <a:p/>
           <a:p>
             <a:r>
               <a:t>===BLOCK===</a:t>
@@ -6088,9 +3595,7 @@
               <a:t>{{BLOCK:IMAGE}}</a:t>
             </a:r>
           </a:p>
-          <a:p>
-            <a:endParaRPr/>
-          </a:p>
+          <a:p/>
           <a:p>
             <a:r>
               <a:t>export-image-mode: slide_with_rectpct</a:t>
@@ -6103,21 +3608,10 @@
           </a:p>
           <a:p>
             <a:r>
-              <a:rPr lang="en-US"/>
-              <a:t>export-image: </a:t>
-            </a:r>
-            <a:r>
-              <a:rPr lang="en-US" altLang="ja-JP"/>
-              <a:t>../</a:t>
-            </a:r>
-            <a:r>
-              <a:rPr lang="en-US"/>
-              <a:t>extracted/figures/&lt;__BASEFILENAME__&gt;_slide&lt;__SLIDENUM__&gt;_fig.png</a:t>
-            </a:r>
-          </a:p>
-          <a:p>
-            <a:endParaRPr/>
-          </a:p>
+              <a:t>export-image: ../extracted/figures/&lt;__BASEFILENAME__&gt;_slide&lt;__SLIDENUM__&gt;_fig.png</a:t>
+            </a:r>
+          </a:p>
+          <a:p/>
           <a:p>
             <a:r>
               <a:t>===BLOCK===</a:t>
@@ -6128,124 +3622,71 @@
               <a:t>{{BLOCK:MD:LONG}}</a:t>
             </a:r>
           </a:p>
-          <a:p>
-            <a:endParaRPr/>
-          </a:p>
-          <a:p>
-            <a:r>
-              <a:rPr lang="en-US"/>
-              <a:t>export-note: </a:t>
-            </a:r>
-            <a:r>
-              <a:rPr lang="en-US" altLang="ja-JP"/>
-              <a:t>../</a:t>
-            </a:r>
-            <a:r>
-              <a:rPr lang="en-US"/>
-              <a:t>extracted/&lt;__BASEFILENAME__&gt;_slide&lt;__SLIDENUM__&gt;_md.md</a:t>
-            </a:r>
-          </a:p>
-          <a:p>
-            <a:r>
-              <a:rPr lang="en-US"/>
+          <a:p/>
+          <a:p>
+            <a:r>
+              <a:t>export-note: ../extracted/&lt;__BASEFILENAME__&gt;_slide&lt;__SLIDENUM__&gt;_md.md</a:t>
+            </a:r>
+          </a:p>
+          <a:p>
+            <a:r>
               <a:t>{{#id:section:&lt;__BASEFILENAME__&gt;:slide&lt;__SLIDENUM__&gt;}}</a:t>
             </a:r>
           </a:p>
           <a:p>
             <a:r>
-              <a:rPr lang="en-US"/>
               <a:t>## &lt;__TITLE__&gt;</a:t>
             </a:r>
           </a:p>
-          <a:p>
-            <a:endParaRPr/>
-          </a:p>
+          <a:p/>
           <a:p>
             <a:r>
               <a:t>PowerPoint で研修用のテキストを作るときは、こんな悩みがよくあります。（研修用テキストに限りませんが）</a:t>
             </a:r>
           </a:p>
-          <a:p>
-            <a:endParaRPr/>
-          </a:p>
+          <a:p/>
           <a:p>
             <a:r>
               <a:t>Ａ社向けに作ったテキストをコピー＋ちょっと修正してＢ社向けを作り、それをまたコピー＋ちょっと修正してＣ社向けを作り、・・・・ということを繰り返すわけです。すると、ちょっとずつ違うバージョンが無数に増えてしまい、収拾がつかなくなってしまいます。</a:t>
             </a:r>
           </a:p>
-          <a:p>
-            <a:endParaRPr/>
-          </a:p>
+          <a:p/>
           <a:p>
             <a:r>
               <a:t>「ちょっと修正」 の中にはそのまま永続的に使うものもあれば、そのときだけの臨時の修正もあり、それを区別しておかないと **「あれ？　以前、ここのところ直したはずだったんだけど・・・」**　という問題が起きてしまいます。</a:t>
             </a:r>
           </a:p>
-          <a:p>
-            <a:endParaRPr/>
-          </a:p>
-          <a:p>
-            <a:r>
-              <a:t>```{=latex}</a:t>
-            </a:r>
-          </a:p>
-          <a:p>
-            <a:r>
-              <a:t>\begin{center}</a:t>
-            </a:r>
-          </a:p>
-          <a:p>
-            <a:r>
-              <a:t>```</a:t>
-            </a:r>
-          </a:p>
-          <a:p>
-            <a:endParaRPr/>
-          </a:p>
-          <a:p>
-            <a:r>
-              <a:rPr lang="en-US"/>
+          <a:p/>
+          <a:p>
+            <a:r>
+              <a:t>::: {.center}</a:t>
+            </a:r>
+          </a:p>
+          <a:p/>
+          <a:p>
+            <a:r>
               <a:t>![](figures/&lt;__BASEFILENAME__&gt;_slide&lt;__SLIDENUM__&gt;_fig.png){ width=90% }</a:t>
             </a:r>
           </a:p>
-          <a:p>
-            <a:endParaRPr/>
-          </a:p>
-          <a:p>
-            <a:r>
-              <a:t>```{=latex}</a:t>
-            </a:r>
-          </a:p>
-          <a:p>
-            <a:r>
-              <a:t>\end{center}</a:t>
-            </a:r>
-          </a:p>
-          <a:p>
-            <a:r>
-              <a:t>```</a:t>
-            </a:r>
-          </a:p>
-          <a:p>
-            <a:endParaRPr/>
-          </a:p>
+          <a:p/>
+          <a:p>
+            <a:r>
+              <a:t>:::</a:t>
+            </a:r>
+          </a:p>
+          <a:p/>
           <a:p>
             <a:r>
               <a:t>結局、コピーが増殖すると、どれをマスター原本にしたら良いのか分かりません。</a:t>
             </a:r>
           </a:p>
-          <a:p>
-            <a:endParaRPr/>
-          </a:p>
+          <a:p/>
           <a:p>
             <a:r>
               <a:t>さらに、企業研修は同じ講座を定期的に行うことが多いので、「Ａ、Ｂ、Ｃ社向け」 をそれぞれメンテナンスしなければいけないのですが、すべてコピーですから、同じ修正をすべてに行う必要があり、とても面倒です。</a:t>
             </a:r>
-            <a:endParaRPr lang="en-US"/>
-          </a:p>
-          <a:p>
-            <a:endParaRPr/>
-          </a:p>
+          </a:p>
+          <a:p/>
         </p:txBody>
       </p:sp>
       <p:sp>
@@ -6356,9 +3797,7 @@
               <a:t>NOTE_CONTENT_FORMAT: 1.0</a:t>
             </a:r>
           </a:p>
-          <a:p>
-            <a:endParaRPr/>
-          </a:p>
+          <a:p/>
           <a:p>
             <a:r>
               <a:t>===BLOCK===</a:t>
@@ -6369,9 +3808,7 @@
               <a:t>{{BLOCK:IMAGE}}</a:t>
             </a:r>
           </a:p>
-          <a:p>
-            <a:endParaRPr/>
-          </a:p>
+          <a:p/>
           <a:p>
             <a:r>
               <a:t>export-image-mode: slide_with_rectpct</a:t>
@@ -6384,21 +3821,10 @@
           </a:p>
           <a:p>
             <a:r>
-              <a:rPr lang="en-US"/>
-              <a:t>export-image: </a:t>
-            </a:r>
-            <a:r>
-              <a:rPr lang="en-US" altLang="ja-JP"/>
-              <a:t>../</a:t>
-            </a:r>
-            <a:r>
-              <a:rPr lang="en-US"/>
-              <a:t>extracted/figures/&lt;__BASEFILENAME__&gt;_slide&lt;__SLIDENUM__&gt;_fig.png</a:t>
-            </a:r>
-          </a:p>
-          <a:p>
-            <a:endParaRPr/>
-          </a:p>
+              <a:t>export-image: ../extracted/figures/&lt;__BASEFILENAME__&gt;_slide&lt;__SLIDENUM__&gt;_fig.png</a:t>
+            </a:r>
+          </a:p>
+          <a:p/>
           <a:p>
             <a:r>
               <a:t>===BLOCK===</a:t>
@@ -6409,100 +3835,53 @@
               <a:t>{{BLOCK:MD:LONG}}</a:t>
             </a:r>
           </a:p>
-          <a:p>
-            <a:endParaRPr/>
-          </a:p>
-          <a:p>
-            <a:r>
-              <a:rPr lang="en-US"/>
-              <a:t>export-note: </a:t>
-            </a:r>
-            <a:r>
-              <a:rPr lang="en-US" altLang="ja-JP"/>
-              <a:t>../</a:t>
-            </a:r>
-            <a:r>
-              <a:rPr lang="en-US"/>
-              <a:t>extracted/&lt;__BASEFILENAME__&gt;_slide&lt;__SLIDENUM__&gt;_md.md</a:t>
-            </a:r>
-          </a:p>
-          <a:p>
-            <a:r>
-              <a:rPr lang="en-US"/>
+          <a:p/>
+          <a:p>
+            <a:r>
+              <a:t>export-note: ../extracted/&lt;__BASEFILENAME__&gt;_slide&lt;__SLIDENUM__&gt;_md.md</a:t>
+            </a:r>
+          </a:p>
+          <a:p>
+            <a:r>
               <a:t>{{#id:section:&lt;__BASEFILENAME__&gt;:slide&lt;__SLIDENUM__&gt;}}</a:t>
             </a:r>
           </a:p>
           <a:p>
             <a:r>
-              <a:rPr lang="en-US"/>
               <a:t>## &lt;__TITLE__&gt;</a:t>
             </a:r>
           </a:p>
-          <a:p>
-            <a:endParaRPr/>
-          </a:p>
+          <a:p/>
           <a:p>
             <a:r>
               <a:t>また別な悩みもあります。研修用テキストはページ数が多いので章・節番号をつけたくなるのですが、PowerPointにはWordのような自動付番機能がないので、手作業でやらなければなりません。</a:t>
             </a:r>
           </a:p>
-          <a:p>
-            <a:endParaRPr/>
-          </a:p>
-          <a:p>
-            <a:r>
-              <a:t>```{=latex}</a:t>
-            </a:r>
-          </a:p>
-          <a:p>
-            <a:r>
-              <a:t>\begin{center}</a:t>
-            </a:r>
-          </a:p>
-          <a:p>
-            <a:r>
-              <a:t>```</a:t>
-            </a:r>
-          </a:p>
-          <a:p>
-            <a:endParaRPr/>
-          </a:p>
-          <a:p>
-            <a:r>
-              <a:rPr lang="en-US"/>
+          <a:p/>
+          <a:p>
+            <a:r>
+              <a:t>::: {.center}</a:t>
+            </a:r>
+          </a:p>
+          <a:p/>
+          <a:p>
+            <a:r>
               <a:t>![](figures/&lt;__BASEFILENAME__&gt;_slide&lt;__SLIDENUM__&gt;_fig.png){ width=95% }</a:t>
             </a:r>
           </a:p>
-          <a:p>
-            <a:endParaRPr/>
-          </a:p>
-          <a:p>
-            <a:r>
-              <a:t>```{=latex}</a:t>
-            </a:r>
-          </a:p>
-          <a:p>
-            <a:r>
-              <a:t>\end{center}</a:t>
-            </a:r>
-          </a:p>
-          <a:p>
-            <a:r>
-              <a:t>```</a:t>
-            </a:r>
-          </a:p>
-          <a:p>
-            <a:endParaRPr/>
-          </a:p>
+          <a:p/>
+          <a:p>
+            <a:r>
+              <a:t>:::</a:t>
+            </a:r>
+          </a:p>
+          <a:p/>
           <a:p>
             <a:r>
               <a:t>プレゼン用の資料なら20ページ程度で済むことが多いですが、研修テキストでは100ページを超えることもよくあります。ページの追加/削除があるたびに手動で付番しなおすのは大変な手間がかかります。</a:t>
             </a:r>
-            <a:endParaRPr lang="en-US"/>
-          </a:p>
-          <a:p>
-            <a:endParaRPr/>
-          </a:p>
+          </a:p>
+          <a:p/>
         </p:txBody>
       </p:sp>
       <p:sp>
@@ -6613,9 +3992,7 @@
               <a:t>NOTE_CONTENT_FORMAT: 1.0</a:t>
             </a:r>
           </a:p>
-          <a:p>
-            <a:endParaRPr/>
-          </a:p>
+          <a:p/>
           <a:p>
             <a:r>
               <a:t>===BLOCK===</a:t>
@@ -6626,9 +4003,7 @@
               <a:t>{{BLOCK:IMAGE}}</a:t>
             </a:r>
           </a:p>
-          <a:p>
-            <a:endParaRPr/>
-          </a:p>
+          <a:p/>
           <a:p>
             <a:r>
               <a:t>export-image-mode: slide_with_rectpct</a:t>
@@ -6641,21 +4016,10 @@
           </a:p>
           <a:p>
             <a:r>
-              <a:rPr lang="en-US"/>
-              <a:t>export-image: </a:t>
-            </a:r>
-            <a:r>
-              <a:rPr lang="en-US" altLang="ja-JP"/>
-              <a:t>../</a:t>
-            </a:r>
-            <a:r>
-              <a:rPr lang="en-US"/>
-              <a:t>extracted/figures/&lt;__BASEFILENAME__&gt;_slide&lt;__SLIDENUM__&gt;_fig.png</a:t>
-            </a:r>
-          </a:p>
-          <a:p>
-            <a:endParaRPr/>
-          </a:p>
+              <a:t>export-image: ../extracted/figures/&lt;__BASEFILENAME__&gt;_slide&lt;__SLIDENUM__&gt;_fig.png</a:t>
+            </a:r>
+          </a:p>
+          <a:p/>
           <a:p>
             <a:r>
               <a:t>===BLOCK===</a:t>
@@ -6666,46 +4030,29 @@
               <a:t>{{BLOCK:MD:LONG}}</a:t>
             </a:r>
           </a:p>
-          <a:p>
-            <a:endParaRPr/>
-          </a:p>
-          <a:p>
-            <a:r>
-              <a:rPr lang="en-US"/>
-              <a:t>export-note: </a:t>
-            </a:r>
-            <a:r>
-              <a:rPr lang="en-US" altLang="ja-JP"/>
-              <a:t>../</a:t>
-            </a:r>
-            <a:r>
-              <a:rPr lang="en-US"/>
-              <a:t>extracted/&lt;__BASEFILENAME__&gt;_slide&lt;__SLIDENUM__&gt;_md.md</a:t>
-            </a:r>
-          </a:p>
-          <a:p>
-            <a:r>
-              <a:rPr lang="en-US"/>
+          <a:p/>
+          <a:p>
+            <a:r>
+              <a:t>export-note: ../extracted/&lt;__BASEFILENAME__&gt;_slide&lt;__SLIDENUM__&gt;_md.md</a:t>
+            </a:r>
+          </a:p>
+          <a:p>
+            <a:r>
               <a:t>{{#id:section:&lt;__BASEFILENAME__&gt;:slide&lt;__SLIDENUM__&gt;}}</a:t>
             </a:r>
           </a:p>
           <a:p>
             <a:r>
-              <a:rPr lang="en-US"/>
               <a:t>## &lt;__TITLE__&gt;</a:t>
             </a:r>
           </a:p>
-          <a:p>
-            <a:endParaRPr/>
-          </a:p>
+          <a:p/>
           <a:p>
             <a:r>
               <a:t>つまり悩みはおおまかに</a:t>
             </a:r>
           </a:p>
-          <a:p>
-            <a:endParaRPr/>
-          </a:p>
+          <a:p/>
           <a:p>
             <a:r>
               <a:t>1. コピー増殖問題</a:t>
@@ -6716,71 +4063,37 @@
               <a:t>1. 章節番号問題</a:t>
             </a:r>
           </a:p>
-          <a:p>
-            <a:endParaRPr/>
-          </a:p>
+          <a:p/>
           <a:p>
             <a:r>
               <a:t>の2つです。なんとかこれを解決できないか？　と考えて、</a:t>
             </a:r>
           </a:p>
-          <a:p>
-            <a:endParaRPr/>
-          </a:p>
-          <a:p>
-            <a:r>
-              <a:t>```{=latex}</a:t>
-            </a:r>
-          </a:p>
-          <a:p>
-            <a:r>
-              <a:t>\begin{center}</a:t>
-            </a:r>
-          </a:p>
-          <a:p>
-            <a:r>
-              <a:t>```</a:t>
-            </a:r>
-          </a:p>
-          <a:p>
-            <a:endParaRPr/>
-          </a:p>
-          <a:p>
-            <a:r>
-              <a:rPr lang="en-US"/>
+          <a:p/>
+          <a:p>
+            <a:r>
+              <a:t>::: {.center}</a:t>
+            </a:r>
+          </a:p>
+          <a:p/>
+          <a:p>
+            <a:r>
               <a:t>![](figures/&lt;__BASEFILENAME__&gt;_slide&lt;__SLIDENUM__&gt;_fig.png){ width=80% }</a:t>
             </a:r>
           </a:p>
-          <a:p>
-            <a:endParaRPr/>
-          </a:p>
-          <a:p>
-            <a:r>
-              <a:t>```{=latex}</a:t>
-            </a:r>
-          </a:p>
-          <a:p>
-            <a:r>
-              <a:t>\end{center}</a:t>
-            </a:r>
-          </a:p>
-          <a:p>
-            <a:r>
-              <a:t>```</a:t>
-            </a:r>
-          </a:p>
-          <a:p>
-            <a:endParaRPr/>
-          </a:p>
+          <a:p/>
+          <a:p>
+            <a:r>
+              <a:t>:::</a:t>
+            </a:r>
+          </a:p>
+          <a:p/>
           <a:p>
             <a:r>
               <a:t>PowerPoint 部品マージツール、 PPT &amp; MD merger を作りました！</a:t>
             </a:r>
-            <a:endParaRPr lang="en-US"/>
-          </a:p>
-          <a:p>
-            <a:endParaRPr/>
-          </a:p>
+          </a:p>
+          <a:p/>
         </p:txBody>
       </p:sp>
       <p:sp>
@@ -6891,9 +4204,7 @@
               <a:t>NOTE_CONTENT_FORMAT: 1.0</a:t>
             </a:r>
           </a:p>
-          <a:p>
-            <a:endParaRPr/>
-          </a:p>
+          <a:p/>
           <a:p>
             <a:r>
               <a:t>===BLOCK===</a:t>
@@ -6904,9 +4215,7 @@
               <a:t>{{BLOCK:IMAGE}}</a:t>
             </a:r>
           </a:p>
-          <a:p>
-            <a:endParaRPr/>
-          </a:p>
+          <a:p/>
           <a:p>
             <a:r>
               <a:t>export-image-mode: slide_with_rectpct</a:t>
@@ -6919,21 +4228,10 @@
           </a:p>
           <a:p>
             <a:r>
-              <a:rPr lang="en-US"/>
-              <a:t>export-image: </a:t>
-            </a:r>
-            <a:r>
-              <a:rPr lang="en-US" altLang="ja-JP"/>
-              <a:t>../</a:t>
-            </a:r>
-            <a:r>
-              <a:rPr lang="en-US"/>
-              <a:t>extracted/figures/&lt;__BASEFILENAME__&gt;_slide&lt;__SLIDENUM__&gt;_fig.png</a:t>
-            </a:r>
-          </a:p>
-          <a:p>
-            <a:endParaRPr/>
-          </a:p>
+              <a:t>export-image: ../extracted/figures/&lt;__BASEFILENAME__&gt;_slide&lt;__SLIDENUM__&gt;_fig.png</a:t>
+            </a:r>
+          </a:p>
+          <a:p/>
           <a:p>
             <a:r>
               <a:t>===BLOCK===</a:t>
@@ -6944,108 +4242,59 @@
               <a:t>{{BLOCK:MD:LONG}}</a:t>
             </a:r>
           </a:p>
-          <a:p>
-            <a:endParaRPr/>
-          </a:p>
-          <a:p>
-            <a:r>
-              <a:rPr lang="en-US"/>
-              <a:t>export-note: </a:t>
-            </a:r>
-            <a:r>
-              <a:rPr lang="en-US" altLang="ja-JP"/>
-              <a:t>../</a:t>
-            </a:r>
-            <a:r>
-              <a:rPr lang="en-US"/>
-              <a:t>extracted/&lt;__BASEFILENAME__&gt;_slide&lt;__SLIDENUM__&gt;_md.md</a:t>
-            </a:r>
-          </a:p>
-          <a:p>
-            <a:r>
-              <a:rPr lang="en-US"/>
+          <a:p/>
+          <a:p>
+            <a:r>
+              <a:t>export-note: ../extracted/&lt;__BASEFILENAME__&gt;_slide&lt;__SLIDENUM__&gt;_md.md</a:t>
+            </a:r>
+          </a:p>
+          <a:p>
+            <a:r>
               <a:t>{{#id:section:&lt;__BASEFILENAME__&gt;:slide&lt;__SLIDENUM__&gt;}}</a:t>
             </a:r>
           </a:p>
           <a:p>
             <a:r>
-              <a:rPr lang="en-US"/>
               <a:t>## &lt;__TITLE__&gt;</a:t>
             </a:r>
           </a:p>
-          <a:p>
-            <a:endParaRPr/>
-          </a:p>
+          <a:p/>
           <a:p>
             <a:r>
               <a:t>いったん、問題の構造を整理しましょう。</a:t>
             </a:r>
           </a:p>
-          <a:p>
-            <a:endParaRPr/>
-          </a:p>
+          <a:p/>
           <a:p>
             <a:r>
               <a:t>大きなPowerPointファイルも実際は小さな部品の集合体です。</a:t>
             </a:r>
           </a:p>
-          <a:p>
-            <a:endParaRPr/>
-          </a:p>
-          <a:p>
-            <a:r>
-              <a:t>```{=latex}</a:t>
-            </a:r>
-          </a:p>
-          <a:p>
-            <a:r>
-              <a:t>\begin{center}</a:t>
-            </a:r>
-          </a:p>
-          <a:p>
-            <a:r>
-              <a:t>```</a:t>
-            </a:r>
-          </a:p>
-          <a:p>
-            <a:endParaRPr/>
-          </a:p>
-          <a:p>
-            <a:r>
-              <a:rPr lang="en-US"/>
+          <a:p/>
+          <a:p>
+            <a:r>
+              <a:t>::: {.center}</a:t>
+            </a:r>
+          </a:p>
+          <a:p/>
+          <a:p>
+            <a:r>
               <a:t>![](figures/&lt;__BASEFILENAME__&gt;_slide&lt;__SLIDENUM__&gt;_fig.png){ width=80% }</a:t>
             </a:r>
           </a:p>
-          <a:p>
-            <a:endParaRPr/>
-          </a:p>
-          <a:p>
-            <a:r>
-              <a:t>```{=latex}</a:t>
-            </a:r>
-          </a:p>
-          <a:p>
-            <a:r>
-              <a:t>\end{center}</a:t>
-            </a:r>
-          </a:p>
-          <a:p>
-            <a:r>
-              <a:t>```</a:t>
-            </a:r>
-          </a:p>
-          <a:p>
-            <a:endParaRPr/>
-          </a:p>
+          <a:p/>
+          <a:p>
+            <a:r>
+              <a:t>:::</a:t>
+            </a:r>
+          </a:p>
+          <a:p/>
           <a:p>
             <a:r>
               <a:t>たとえばＡ社向け、Ｂ、Ｃ社向けと3種類の .pptx があるとして、その中には３社共通の部品もあれば２社共通の部品、各社専用の部品もあります。その組合せが各社違うということです。</a:t>
             </a:r>
-            <a:endParaRPr lang="en-US"/>
-          </a:p>
-          <a:p>
-            <a:endParaRPr/>
-          </a:p>
+          </a:p>
+          <a:p/>
         </p:txBody>
       </p:sp>
       <p:sp>
@@ -7156,9 +4405,7 @@
               <a:t>NOTE_CONTENT_FORMAT: 1.0</a:t>
             </a:r>
           </a:p>
-          <a:p>
-            <a:endParaRPr/>
-          </a:p>
+          <a:p/>
           <a:p>
             <a:r>
               <a:t>===BLOCK===</a:t>
@@ -7169,9 +4416,7 @@
               <a:t>{{BLOCK:IMAGE}}</a:t>
             </a:r>
           </a:p>
-          <a:p>
-            <a:endParaRPr/>
-          </a:p>
+          <a:p/>
           <a:p>
             <a:r>
               <a:t>export-image-mode: slide_with_rectpct</a:t>
@@ -7184,13 +4429,10 @@
           </a:p>
           <a:p>
             <a:r>
-              <a:rPr lang="en-US"/>
               <a:t>export-image: ../extracted/figures/&lt;__BASEFILENAME__&gt;_slide&lt;__SLIDENUM__&gt;_fig.png</a:t>
             </a:r>
           </a:p>
-          <a:p>
-            <a:endParaRPr/>
-          </a:p>
+          <a:p/>
           <a:p>
             <a:r>
               <a:t>===BLOCK===</a:t>
@@ -7201,100 +4443,59 @@
               <a:t>{{BLOCK:MD:LONG}}</a:t>
             </a:r>
           </a:p>
-          <a:p>
-            <a:endParaRPr/>
-          </a:p>
-          <a:p>
-            <a:r>
-              <a:rPr lang="en-US"/>
+          <a:p/>
+          <a:p>
+            <a:r>
               <a:t>export-note: ../extracted/&lt;__BASEFILENAME__&gt;_slide&lt;__SLIDENUM__&gt;_md.md</a:t>
             </a:r>
           </a:p>
           <a:p>
             <a:r>
-              <a:rPr lang="en-US"/>
               <a:t>{{#id:section:&lt;__BASEFILENAME__&gt;:slide&lt;__SLIDENUM__&gt;}}</a:t>
             </a:r>
           </a:p>
           <a:p>
             <a:r>
-              <a:rPr lang="en-US"/>
               <a:t>## &lt;__TITLE__&gt;</a:t>
             </a:r>
           </a:p>
-          <a:p>
-            <a:endParaRPr/>
-          </a:p>
+          <a:p/>
           <a:p>
             <a:r>
               <a:t>そこで、部品の組み合わせを自動的に結合（マージ）して完成版を作れるしくみがあれば良さそうです。</a:t>
             </a:r>
           </a:p>
-          <a:p>
-            <a:endParaRPr/>
-          </a:p>
+          <a:p/>
           <a:p>
             <a:r>
               <a:t>pptx部品単位でマスターを管理し、更新は必ずマスターに対して行うようにします。そうすれば 「○○社向け構成」 が何百種類あってもマージするだけで完成版ができるので、自動的に各社向け完成版に反映可能です。</a:t>
             </a:r>
           </a:p>
-          <a:p>
-            <a:endParaRPr/>
-          </a:p>
-          <a:p>
-            <a:r>
-              <a:t>```{=latex}</a:t>
-            </a:r>
-          </a:p>
-          <a:p>
-            <a:r>
-              <a:t>\begin{center}</a:t>
-            </a:r>
-          </a:p>
-          <a:p>
-            <a:r>
-              <a:t>```</a:t>
-            </a:r>
-          </a:p>
-          <a:p>
-            <a:endParaRPr/>
-          </a:p>
-          <a:p>
-            <a:r>
-              <a:rPr lang="en-US"/>
+          <a:p/>
+          <a:p>
+            <a:r>
+              <a:t>::: {.center}</a:t>
+            </a:r>
+          </a:p>
+          <a:p/>
+          <a:p>
+            <a:r>
               <a:t>![](figures/&lt;__BASEFILENAME__&gt;_slide&lt;__SLIDENUM__&gt;_fig.png){ width=95% }</a:t>
             </a:r>
           </a:p>
-          <a:p>
-            <a:endParaRPr/>
-          </a:p>
-          <a:p>
-            <a:r>
-              <a:t>```{=latex}</a:t>
-            </a:r>
-          </a:p>
-          <a:p>
-            <a:r>
-              <a:t>\end{center}</a:t>
-            </a:r>
-          </a:p>
-          <a:p>
-            <a:r>
-              <a:t>```</a:t>
-            </a:r>
-          </a:p>
-          <a:p>
-            <a:endParaRPr/>
-          </a:p>
+          <a:p/>
+          <a:p>
+            <a:r>
+              <a:t>:::</a:t>
+            </a:r>
+          </a:p>
+          <a:p/>
           <a:p>
             <a:r>
               <a:t>したがって、原則としてマージ後は編集しません。（その場限りで捨てるような語句軽微な修正はしてもかまいませんが）</a:t>
             </a:r>
-            <a:endParaRPr lang="en-US"/>
-          </a:p>
-          <a:p>
-            <a:endParaRPr/>
-          </a:p>
+          </a:p>
+          <a:p/>
         </p:txBody>
       </p:sp>
       <p:sp>
@@ -7405,9 +4606,7 @@
               <a:t>NOTE_CONTENT_FORMAT: 1.0</a:t>
             </a:r>
           </a:p>
-          <a:p>
-            <a:endParaRPr/>
-          </a:p>
+          <a:p/>
           <a:p>
             <a:r>
               <a:t>===BLOCK===</a:t>
@@ -7418,9 +4617,7 @@
               <a:t>{{BLOCK:IMAGE}}</a:t>
             </a:r>
           </a:p>
-          <a:p>
-            <a:endParaRPr/>
-          </a:p>
+          <a:p/>
           <a:p>
             <a:r>
               <a:t>export-image-mode: slide_with_rectpct</a:t>
@@ -7433,13 +4630,10 @@
           </a:p>
           <a:p>
             <a:r>
-              <a:rPr lang="en-US"/>
               <a:t>export-image: ../extracted/figures/&lt;__BASEFILENAME__&gt;_slide&lt;__SLIDENUM__&gt;_fig.png</a:t>
             </a:r>
           </a:p>
-          <a:p>
-            <a:endParaRPr/>
-          </a:p>
+          <a:p/>
           <a:p>
             <a:r>
               <a:t>===BLOCK===</a:t>
@@ -7450,92 +4644,53 @@
               <a:t>{{BLOCK:MD:LONG}}</a:t>
             </a:r>
           </a:p>
-          <a:p>
-            <a:endParaRPr/>
-          </a:p>
-          <a:p>
-            <a:r>
-              <a:rPr lang="en-US"/>
+          <a:p/>
+          <a:p>
+            <a:r>
               <a:t>export-note: ../extracted/&lt;__BASEFILENAME__&gt;_slide&lt;__SLIDENUM__&gt;_md.md</a:t>
             </a:r>
           </a:p>
           <a:p>
             <a:r>
-              <a:rPr lang="en-US"/>
               <a:t>{{#id:section:&lt;__BASEFILENAME__&gt;:slide&lt;__SLIDENUM__&gt;}}</a:t>
             </a:r>
           </a:p>
           <a:p>
             <a:r>
-              <a:rPr lang="en-US"/>
               <a:t>## &lt;__TITLE__&gt;</a:t>
             </a:r>
           </a:p>
-          <a:p>
-            <a:endParaRPr/>
-          </a:p>
+          <a:p/>
           <a:p>
             <a:r>
               <a:t>自動マージするときに章/節番号の付与もできます。</a:t>
             </a:r>
           </a:p>
-          <a:p>
-            <a:endParaRPr/>
-          </a:p>
-          <a:p>
-            <a:r>
-              <a:t>```{=latex}</a:t>
-            </a:r>
-          </a:p>
-          <a:p>
-            <a:r>
-              <a:t>\begin{center}</a:t>
-            </a:r>
-          </a:p>
-          <a:p>
-            <a:r>
-              <a:t>```</a:t>
-            </a:r>
-          </a:p>
-          <a:p>
-            <a:endParaRPr/>
-          </a:p>
-          <a:p>
-            <a:r>
-              <a:rPr lang="en-US"/>
+          <a:p/>
+          <a:p>
+            <a:r>
+              <a:t>::: {.center}</a:t>
+            </a:r>
+          </a:p>
+          <a:p/>
+          <a:p>
+            <a:r>
               <a:t>![](figures/&lt;__BASEFILENAME__&gt;_slide&lt;__SLIDENUM__&gt;_fig.png){ width=95% }</a:t>
             </a:r>
           </a:p>
-          <a:p>
-            <a:endParaRPr/>
-          </a:p>
-          <a:p>
-            <a:r>
-              <a:t>```{=latex}</a:t>
-            </a:r>
-          </a:p>
-          <a:p>
-            <a:r>
-              <a:t>\end{center}</a:t>
-            </a:r>
-          </a:p>
-          <a:p>
-            <a:r>
-              <a:t>```</a:t>
-            </a:r>
-          </a:p>
-          <a:p>
-            <a:endParaRPr/>
-          </a:p>
+          <a:p/>
+          <a:p>
+            <a:r>
+              <a:t>:::</a:t>
+            </a:r>
+          </a:p>
+          <a:p/>
           <a:p>
             <a:r>
               <a:t>部品側には番号を付与せず、マージ時に付番するので各社向けの構成の違いにも対応できます。</a:t>
             </a:r>
-            <a:endParaRPr lang="en-US"/>
-          </a:p>
-          <a:p>
-            <a:endParaRPr/>
-          </a:p>
+          </a:p>
+          <a:p/>
         </p:txBody>
       </p:sp>
       <p:sp>
@@ -7646,9 +4801,7 @@
               <a:t>NOTE_CONTENT_FORMAT: 1.0</a:t>
             </a:r>
           </a:p>
-          <a:p>
-            <a:endParaRPr/>
-          </a:p>
+          <a:p/>
           <a:p>
             <a:r>
               <a:t>===BLOCK===</a:t>
@@ -7659,9 +4812,7 @@
               <a:t>{{BLOCK:IMAGE}}</a:t>
             </a:r>
           </a:p>
-          <a:p>
-            <a:endParaRPr/>
-          </a:p>
+          <a:p/>
           <a:p>
             <a:r>
               <a:t>export-image-mode: slide_with_rectpct</a:t>
@@ -7674,13 +4825,10 @@
           </a:p>
           <a:p>
             <a:r>
-              <a:rPr lang="en-US"/>
               <a:t>export-image: ../extracted/figures/&lt;__BASEFILENAME__&gt;_slide&lt;__SLIDENUM__&gt;_fig.png</a:t>
             </a:r>
           </a:p>
-          <a:p>
-            <a:endParaRPr/>
-          </a:p>
+          <a:p/>
           <a:p>
             <a:r>
               <a:t>===BLOCK===</a:t>
@@ -7691,92 +4839,53 @@
               <a:t>{{BLOCK:MD:LONG}}</a:t>
             </a:r>
           </a:p>
-          <a:p>
-            <a:endParaRPr/>
-          </a:p>
-          <a:p>
-            <a:r>
-              <a:rPr lang="en-US"/>
+          <a:p/>
+          <a:p>
+            <a:r>
               <a:t>export-note: ../extracted/&lt;__BASEFILENAME__&gt;_slide&lt;__SLIDENUM__&gt;_md.md</a:t>
             </a:r>
           </a:p>
           <a:p>
             <a:r>
-              <a:rPr lang="en-US"/>
               <a:t>{{#id:section:&lt;__BASEFILENAME__&gt;:slide&lt;__SLIDENUM__&gt;}}</a:t>
             </a:r>
           </a:p>
           <a:p>
             <a:r>
-              <a:rPr lang="en-US"/>
               <a:t>## &lt;__TITLE__&gt;</a:t>
             </a:r>
           </a:p>
-          <a:p>
-            <a:endParaRPr/>
-          </a:p>
+          <a:p/>
           <a:p>
             <a:r>
               <a:t>さらに変数置換機能をつけました。 pptx部品上で特殊な書式で変数を書いておくと、その内容をマージ仕様書の設定にしたがって書き換えられます。</a:t>
             </a:r>
           </a:p>
-          <a:p>
-            <a:endParaRPr/>
-          </a:p>
-          <a:p>
-            <a:r>
-              <a:t>```{=latex}</a:t>
-            </a:r>
-          </a:p>
-          <a:p>
-            <a:r>
-              <a:t>\begin{center}</a:t>
-            </a:r>
-          </a:p>
-          <a:p>
-            <a:r>
-              <a:t>```</a:t>
-            </a:r>
-          </a:p>
-          <a:p>
-            <a:endParaRPr/>
-          </a:p>
-          <a:p>
-            <a:r>
-              <a:rPr lang="en-US"/>
+          <a:p/>
+          <a:p>
+            <a:r>
+              <a:t>::: {.center}</a:t>
+            </a:r>
+          </a:p>
+          <a:p/>
+          <a:p>
+            <a:r>
               <a:t>![](figures/&lt;__BASEFILENAME__&gt;_slide&lt;__SLIDENUM__&gt;_fig.png){ width=90% }</a:t>
             </a:r>
           </a:p>
-          <a:p>
-            <a:endParaRPr/>
-          </a:p>
-          <a:p>
-            <a:r>
-              <a:t>```{=latex}</a:t>
-            </a:r>
-          </a:p>
-          <a:p>
-            <a:r>
-              <a:t>\end{center}</a:t>
-            </a:r>
-          </a:p>
-          <a:p>
-            <a:r>
-              <a:t>```</a:t>
-            </a:r>
-          </a:p>
-          <a:p>
-            <a:endParaRPr/>
-          </a:p>
+          <a:p/>
+          <a:p>
+            <a:r>
+              <a:t>:::</a:t>
+            </a:r>
+          </a:p>
+          <a:p/>
           <a:p>
             <a:r>
               <a:t>仕向先別のバリエーションをこの方法でも吸収することができます。</a:t>
             </a:r>
-            <a:endParaRPr lang="en-US"/>
-          </a:p>
-          <a:p>
-            <a:endParaRPr/>
-          </a:p>
+          </a:p>
+          <a:p/>
         </p:txBody>
       </p:sp>
       <p:sp>
